--- a/docs/pptx/Dương Văn Hiệp_110121209_DA21TTB.pptx
+++ b/docs/pptx/Dương Văn Hiệp_110121209_DA21TTB.pptx
@@ -5,12 +5,13 @@
     <p:sldMasterId id="2147483648" r:id="rId1"/>
   </p:sldMasterIdLst>
   <p:notesMasterIdLst>
-    <p:notesMasterId r:id="rId5"/>
+    <p:notesMasterId r:id="rId6"/>
   </p:notesMasterIdLst>
   <p:sldIdLst>
     <p:sldId id="256" r:id="rId2"/>
     <p:sldId id="257" r:id="rId3"/>
     <p:sldId id="258" r:id="rId4"/>
+    <p:sldId id="259" r:id="rId5"/>
   </p:sldIdLst>
   <p:sldSz cx="12192000" cy="6858000"/>
   <p:notesSz cx="6858000" cy="9144000"/>
@@ -121,6 +122,7 @@
           <p14:sldIdLst>
             <p14:sldId id="257"/>
             <p14:sldId id="258"/>
+            <p14:sldId id="259"/>
           </p14:sldIdLst>
         </p14:section>
       </p14:sectionLst>
@@ -569,6 +571,384 @@
 </p:notes>
 </file>
 
+<file path=ppt/notesSlides/notesSlide2.xml><?xml version="1.0" encoding="utf-8"?>
+<p:notes xmlns:a="http://schemas.openxmlformats.org/drawingml/2006/main" xmlns:r="http://schemas.openxmlformats.org/officeDocument/2006/relationships" xmlns:p="http://schemas.openxmlformats.org/presentationml/2006/main">
+  <p:cSld>
+    <p:spTree>
+      <p:nvGrpSpPr>
+        <p:cNvPr id="1" name=""/>
+        <p:cNvGrpSpPr/>
+        <p:nvPr/>
+      </p:nvGrpSpPr>
+      <p:grpSpPr>
+        <a:xfrm>
+          <a:off x="0" y="0"/>
+          <a:ext cx="0" cy="0"/>
+          <a:chOff x="0" y="0"/>
+          <a:chExt cx="0" cy="0"/>
+        </a:xfrm>
+      </p:grpSpPr>
+      <p:sp>
+        <p:nvSpPr>
+          <p:cNvPr id="2" name="Slide Image Placeholder 1"/>
+          <p:cNvSpPr>
+            <a:spLocks noGrp="1" noRot="1" noChangeAspect="1"/>
+          </p:cNvSpPr>
+          <p:nvPr>
+            <p:ph type="sldImg"/>
+          </p:nvPr>
+        </p:nvSpPr>
+        <p:spPr/>
+      </p:sp>
+      <p:sp>
+        <p:nvSpPr>
+          <p:cNvPr id="3" name="Notes Placeholder 2"/>
+          <p:cNvSpPr>
+            <a:spLocks noGrp="1"/>
+          </p:cNvSpPr>
+          <p:nvPr>
+            <p:ph type="body" idx="1"/>
+          </p:nvPr>
+        </p:nvSpPr>
+        <p:spPr/>
+        <p:txBody>
+          <a:bodyPr/>
+          <a:lstStyle/>
+          <a:p>
+            <a:endParaRPr lang="en-US" dirty="0"/>
+          </a:p>
+        </p:txBody>
+      </p:sp>
+      <p:sp>
+        <p:nvSpPr>
+          <p:cNvPr id="4" name="Slide Number Placeholder 3"/>
+          <p:cNvSpPr>
+            <a:spLocks noGrp="1"/>
+          </p:cNvSpPr>
+          <p:nvPr>
+            <p:ph type="sldNum" sz="quarter" idx="5"/>
+          </p:nvPr>
+        </p:nvSpPr>
+        <p:spPr/>
+        <p:txBody>
+          <a:bodyPr/>
+          <a:lstStyle/>
+          <a:p>
+            <a:fld id="{FDD2A79F-59E5-49B9-A316-22BCC94F9756}" type="slidenum">
+              <a:rPr lang="en-AU" smtClean="0"/>
+              <a:t>1</a:t>
+            </a:fld>
+            <a:endParaRPr lang="en-AU"/>
+          </a:p>
+        </p:txBody>
+      </p:sp>
+    </p:spTree>
+    <p:extLst>
+      <p:ext uri="{BB962C8B-B14F-4D97-AF65-F5344CB8AC3E}">
+        <p14:creationId xmlns:p14="http://schemas.microsoft.com/office/powerpoint/2010/main" val="2671354003"/>
+      </p:ext>
+    </p:extLst>
+  </p:cSld>
+  <p:clrMapOvr>
+    <a:masterClrMapping/>
+  </p:clrMapOvr>
+</p:notes>
+</file>
+
+<file path=ppt/notesSlides/notesSlide3.xml><?xml version="1.0" encoding="utf-8"?>
+<p:notes xmlns:a="http://schemas.openxmlformats.org/drawingml/2006/main" xmlns:r="http://schemas.openxmlformats.org/officeDocument/2006/relationships" xmlns:p="http://schemas.openxmlformats.org/presentationml/2006/main">
+  <p:cSld>
+    <p:spTree>
+      <p:nvGrpSpPr>
+        <p:cNvPr id="1" name="">
+          <a:extLst>
+            <a:ext uri="{FF2B5EF4-FFF2-40B4-BE49-F238E27FC236}">
+              <a16:creationId xmlns:a16="http://schemas.microsoft.com/office/drawing/2014/main" id="{44D62C55-8F3C-835A-935F-BF67B4199938}"/>
+            </a:ext>
+          </a:extLst>
+        </p:cNvPr>
+        <p:cNvGrpSpPr/>
+        <p:nvPr/>
+      </p:nvGrpSpPr>
+      <p:grpSpPr>
+        <a:xfrm>
+          <a:off x="0" y="0"/>
+          <a:ext cx="0" cy="0"/>
+          <a:chOff x="0" y="0"/>
+          <a:chExt cx="0" cy="0"/>
+        </a:xfrm>
+      </p:grpSpPr>
+      <p:sp>
+        <p:nvSpPr>
+          <p:cNvPr id="2" name="Slide Image Placeholder 1">
+            <a:extLst>
+              <a:ext uri="{FF2B5EF4-FFF2-40B4-BE49-F238E27FC236}">
+                <a16:creationId xmlns:a16="http://schemas.microsoft.com/office/drawing/2014/main" id="{F5437354-8E7A-0FF7-04A2-FFECF8202A4D}"/>
+              </a:ext>
+            </a:extLst>
+          </p:cNvPr>
+          <p:cNvSpPr>
+            <a:spLocks noGrp="1" noRot="1" noChangeAspect="1"/>
+          </p:cNvSpPr>
+          <p:nvPr>
+            <p:ph type="sldImg"/>
+          </p:nvPr>
+        </p:nvSpPr>
+        <p:spPr/>
+      </p:sp>
+      <p:sp>
+        <p:nvSpPr>
+          <p:cNvPr id="3" name="Notes Placeholder 2">
+            <a:extLst>
+              <a:ext uri="{FF2B5EF4-FFF2-40B4-BE49-F238E27FC236}">
+                <a16:creationId xmlns:a16="http://schemas.microsoft.com/office/drawing/2014/main" id="{247A59B1-D59B-F2B7-EC8E-FFDA3EA33EEA}"/>
+              </a:ext>
+            </a:extLst>
+          </p:cNvPr>
+          <p:cNvSpPr>
+            <a:spLocks noGrp="1"/>
+          </p:cNvSpPr>
+          <p:nvPr>
+            <p:ph type="body" idx="1"/>
+          </p:nvPr>
+        </p:nvSpPr>
+        <p:spPr/>
+        <p:txBody>
+          <a:bodyPr/>
+          <a:lstStyle/>
+          <a:p>
+            <a:r>
+              <a:rPr lang="en-US" dirty="0" err="1"/>
+              <a:t>Hiện</a:t>
+            </a:r>
+            <a:r>
+              <a:rPr lang="en-US" dirty="0"/>
+              <a:t> </a:t>
+            </a:r>
+            <a:r>
+              <a:rPr lang="en-US" dirty="0" err="1"/>
+              <a:t>tại</a:t>
+            </a:r>
+            <a:r>
+              <a:rPr lang="en-US" dirty="0"/>
+              <a:t>…</a:t>
+            </a:r>
+          </a:p>
+          <a:p>
+            <a:r>
+              <a:rPr lang="en-US" dirty="0" err="1"/>
+              <a:t>Từ</a:t>
+            </a:r>
+            <a:r>
+              <a:rPr lang="en-US" dirty="0"/>
+              <a:t> </a:t>
+            </a:r>
+            <a:r>
+              <a:rPr lang="en-US" dirty="0" err="1"/>
+              <a:t>đó</a:t>
+            </a:r>
+            <a:r>
+              <a:rPr lang="en-US" dirty="0"/>
+              <a:t>….</a:t>
+            </a:r>
+          </a:p>
+          <a:p>
+            <a:r>
+              <a:rPr lang="en-US" dirty="0"/>
+              <a:t>….</a:t>
+            </a:r>
+          </a:p>
+        </p:txBody>
+      </p:sp>
+      <p:sp>
+        <p:nvSpPr>
+          <p:cNvPr id="4" name="Slide Number Placeholder 3">
+            <a:extLst>
+              <a:ext uri="{FF2B5EF4-FFF2-40B4-BE49-F238E27FC236}">
+                <a16:creationId xmlns:a16="http://schemas.microsoft.com/office/drawing/2014/main" id="{7F90BDD9-7C30-3451-3632-5F635116314B}"/>
+              </a:ext>
+            </a:extLst>
+          </p:cNvPr>
+          <p:cNvSpPr>
+            <a:spLocks noGrp="1"/>
+          </p:cNvSpPr>
+          <p:nvPr>
+            <p:ph type="sldNum" sz="quarter" idx="5"/>
+          </p:nvPr>
+        </p:nvSpPr>
+        <p:spPr/>
+        <p:txBody>
+          <a:bodyPr/>
+          <a:lstStyle/>
+          <a:p>
+            <a:fld id="{FDD2A79F-59E5-49B9-A316-22BCC94F9756}" type="slidenum">
+              <a:rPr lang="en-AU" smtClean="0"/>
+              <a:t>2</a:t>
+            </a:fld>
+            <a:endParaRPr lang="en-AU"/>
+          </a:p>
+        </p:txBody>
+      </p:sp>
+    </p:spTree>
+    <p:extLst>
+      <p:ext uri="{BB962C8B-B14F-4D97-AF65-F5344CB8AC3E}">
+        <p14:creationId xmlns:p14="http://schemas.microsoft.com/office/powerpoint/2010/main" val="1513788641"/>
+      </p:ext>
+    </p:extLst>
+  </p:cSld>
+  <p:clrMapOvr>
+    <a:masterClrMapping/>
+  </p:clrMapOvr>
+</p:notes>
+</file>
+
+<file path=ppt/notesSlides/notesSlide4.xml><?xml version="1.0" encoding="utf-8"?>
+<p:notes xmlns:a="http://schemas.openxmlformats.org/drawingml/2006/main" xmlns:r="http://schemas.openxmlformats.org/officeDocument/2006/relationships" xmlns:p="http://schemas.openxmlformats.org/presentationml/2006/main">
+  <p:cSld>
+    <p:spTree>
+      <p:nvGrpSpPr>
+        <p:cNvPr id="1" name="">
+          <a:extLst>
+            <a:ext uri="{FF2B5EF4-FFF2-40B4-BE49-F238E27FC236}">
+              <a16:creationId xmlns:a16="http://schemas.microsoft.com/office/drawing/2014/main" id="{1606DF7F-9C52-0EB9-CECA-96C714F7F595}"/>
+            </a:ext>
+          </a:extLst>
+        </p:cNvPr>
+        <p:cNvGrpSpPr/>
+        <p:nvPr/>
+      </p:nvGrpSpPr>
+      <p:grpSpPr>
+        <a:xfrm>
+          <a:off x="0" y="0"/>
+          <a:ext cx="0" cy="0"/>
+          <a:chOff x="0" y="0"/>
+          <a:chExt cx="0" cy="0"/>
+        </a:xfrm>
+      </p:grpSpPr>
+      <p:sp>
+        <p:nvSpPr>
+          <p:cNvPr id="2" name="Slide Image Placeholder 1">
+            <a:extLst>
+              <a:ext uri="{FF2B5EF4-FFF2-40B4-BE49-F238E27FC236}">
+                <a16:creationId xmlns:a16="http://schemas.microsoft.com/office/drawing/2014/main" id="{BACD0423-4DFC-A985-C022-E0A876ED20A8}"/>
+              </a:ext>
+            </a:extLst>
+          </p:cNvPr>
+          <p:cNvSpPr>
+            <a:spLocks noGrp="1" noRot="1" noChangeAspect="1"/>
+          </p:cNvSpPr>
+          <p:nvPr>
+            <p:ph type="sldImg"/>
+          </p:nvPr>
+        </p:nvSpPr>
+        <p:spPr/>
+      </p:sp>
+      <p:sp>
+        <p:nvSpPr>
+          <p:cNvPr id="3" name="Notes Placeholder 2">
+            <a:extLst>
+              <a:ext uri="{FF2B5EF4-FFF2-40B4-BE49-F238E27FC236}">
+                <a16:creationId xmlns:a16="http://schemas.microsoft.com/office/drawing/2014/main" id="{91A67F75-B7B9-4A8B-16FB-7958EE558AE7}"/>
+              </a:ext>
+            </a:extLst>
+          </p:cNvPr>
+          <p:cNvSpPr>
+            <a:spLocks noGrp="1"/>
+          </p:cNvSpPr>
+          <p:nvPr>
+            <p:ph type="body" idx="1"/>
+          </p:nvPr>
+        </p:nvSpPr>
+        <p:spPr/>
+        <p:txBody>
+          <a:bodyPr/>
+          <a:lstStyle/>
+          <a:p>
+            <a:r>
+              <a:rPr lang="en-US" dirty="0" err="1"/>
+              <a:t>Hiện</a:t>
+            </a:r>
+            <a:r>
+              <a:rPr lang="en-US" dirty="0"/>
+              <a:t> </a:t>
+            </a:r>
+            <a:r>
+              <a:rPr lang="en-US" dirty="0" err="1"/>
+              <a:t>tại</a:t>
+            </a:r>
+            <a:r>
+              <a:rPr lang="en-US" dirty="0"/>
+              <a:t>…</a:t>
+            </a:r>
+          </a:p>
+          <a:p>
+            <a:r>
+              <a:rPr lang="en-US" dirty="0" err="1"/>
+              <a:t>Từ</a:t>
+            </a:r>
+            <a:r>
+              <a:rPr lang="en-US" dirty="0"/>
+              <a:t> </a:t>
+            </a:r>
+            <a:r>
+              <a:rPr lang="en-US" dirty="0" err="1"/>
+              <a:t>đó</a:t>
+            </a:r>
+            <a:r>
+              <a:rPr lang="en-US" dirty="0"/>
+              <a:t>….</a:t>
+            </a:r>
+          </a:p>
+          <a:p>
+            <a:r>
+              <a:rPr lang="en-US" dirty="0"/>
+              <a:t>….</a:t>
+            </a:r>
+          </a:p>
+        </p:txBody>
+      </p:sp>
+      <p:sp>
+        <p:nvSpPr>
+          <p:cNvPr id="4" name="Slide Number Placeholder 3">
+            <a:extLst>
+              <a:ext uri="{FF2B5EF4-FFF2-40B4-BE49-F238E27FC236}">
+                <a16:creationId xmlns:a16="http://schemas.microsoft.com/office/drawing/2014/main" id="{34B5B2E4-1767-7BFF-FAE2-2AF5518CE86D}"/>
+              </a:ext>
+            </a:extLst>
+          </p:cNvPr>
+          <p:cNvSpPr>
+            <a:spLocks noGrp="1"/>
+          </p:cNvSpPr>
+          <p:nvPr>
+            <p:ph type="sldNum" sz="quarter" idx="5"/>
+          </p:nvPr>
+        </p:nvSpPr>
+        <p:spPr/>
+        <p:txBody>
+          <a:bodyPr/>
+          <a:lstStyle/>
+          <a:p>
+            <a:fld id="{FDD2A79F-59E5-49B9-A316-22BCC94F9756}" type="slidenum">
+              <a:rPr lang="en-AU" smtClean="0"/>
+              <a:t>3</a:t>
+            </a:fld>
+            <a:endParaRPr lang="en-AU"/>
+          </a:p>
+        </p:txBody>
+      </p:sp>
+    </p:spTree>
+    <p:extLst>
+      <p:ext uri="{BB962C8B-B14F-4D97-AF65-F5344CB8AC3E}">
+        <p14:creationId xmlns:p14="http://schemas.microsoft.com/office/powerpoint/2010/main" val="152753414"/>
+      </p:ext>
+    </p:extLst>
+  </p:cSld>
+  <p:clrMapOvr>
+    <a:masterClrMapping/>
+  </p:clrMapOvr>
+</p:notes>
+</file>
+
 <file path=ppt/slideLayouts/slideLayout1.xml><?xml version="1.0" encoding="utf-8"?>
 <p:sldLayout xmlns:a="http://schemas.openxmlformats.org/drawingml/2006/main" xmlns:r="http://schemas.openxmlformats.org/officeDocument/2006/relationships" xmlns:p="http://schemas.openxmlformats.org/presentationml/2006/main" type="title" preserve="1">
   <p:cSld name="Title Slide">
@@ -3261,7 +3641,7 @@
           </a:prstGeom>
           <a:blipFill dpi="0" rotWithShape="1">
             <a:blip r:embed="rId13">
-              <a:alphaModFix amt="3000"/>
+              <a:alphaModFix amt="2000"/>
             </a:blip>
             <a:srcRect/>
             <a:stretch>
@@ -3541,6 +3921,43 @@
           </a:p>
         </p:txBody>
       </p:sp>
+      <p:pic>
+        <p:nvPicPr>
+          <p:cNvPr id="8" name="Picture 7">
+            <a:extLst>
+              <a:ext uri="{FF2B5EF4-FFF2-40B4-BE49-F238E27FC236}">
+                <a16:creationId xmlns:a16="http://schemas.microsoft.com/office/drawing/2014/main" id="{BC960397-B4A7-9B2C-C9BD-B2CC7993C868}"/>
+              </a:ext>
+            </a:extLst>
+          </p:cNvPr>
+          <p:cNvPicPr>
+            <a:picLocks noChangeAspect="1"/>
+          </p:cNvPicPr>
+          <p:nvPr userDrawn="1"/>
+        </p:nvPicPr>
+        <p:blipFill>
+          <a:blip r:embed="rId14">
+            <a:extLst>
+              <a:ext uri="{28A0092B-C50C-407E-A947-70E740481C1C}">
+                <a14:useLocalDpi xmlns:a14="http://schemas.microsoft.com/office/drawing/2010/main" val="0"/>
+              </a:ext>
+            </a:extLst>
+          </a:blip>
+          <a:srcRect r="21035" b="91521"/>
+          <a:stretch>
+            <a:fillRect/>
+          </a:stretch>
+        </p:blipFill>
+        <p:spPr>
+          <a:xfrm>
+            <a:off x="0" y="6765925"/>
+            <a:ext cx="12192000" cy="92075"/>
+          </a:xfrm>
+          <a:prstGeom prst="rect">
+            <a:avLst/>
+          </a:prstGeom>
+        </p:spPr>
+      </p:pic>
     </p:spTree>
     <p:extLst>
       <p:ext uri="{BB962C8B-B14F-4D97-AF65-F5344CB8AC3E}">
@@ -3881,7 +4298,7 @@
         </p:nvSpPr>
         <p:spPr>
           <a:xfrm>
-            <a:off x="1302212" y="2898066"/>
+            <a:off x="1302214" y="3169091"/>
             <a:ext cx="9587571" cy="1458280"/>
           </a:xfrm>
         </p:spPr>
@@ -4139,7 +4556,7 @@
         </p:nvSpPr>
         <p:spPr>
           <a:xfrm>
-            <a:off x="1696321" y="2044109"/>
+            <a:off x="1696323" y="2315134"/>
             <a:ext cx="8799351" cy="1038708"/>
           </a:xfrm>
         </p:spPr>
@@ -4214,7 +4631,7 @@
         </p:blipFill>
         <p:spPr bwMode="auto">
           <a:xfrm>
-            <a:off x="5576645" y="512441"/>
+            <a:off x="5553195" y="1041605"/>
             <a:ext cx="1038708" cy="1038708"/>
           </a:xfrm>
           <a:prstGeom prst="rect">
@@ -4237,7 +4654,7 @@
         </p:nvSpPr>
         <p:spPr>
           <a:xfrm>
-            <a:off x="5600094" y="1524755"/>
+            <a:off x="5576644" y="2053919"/>
             <a:ext cx="991810" cy="246221"/>
           </a:xfrm>
           <a:prstGeom prst="rect">
@@ -4278,7 +4695,7 @@
         </p:nvSpPr>
         <p:spPr>
           <a:xfrm>
-            <a:off x="1302212" y="4661177"/>
+            <a:off x="1302214" y="4932202"/>
             <a:ext cx="4936028" cy="369332"/>
           </a:xfrm>
           <a:prstGeom prst="rect">
@@ -4353,7 +4770,7 @@
         </p:nvSpPr>
         <p:spPr>
           <a:xfrm>
-            <a:off x="6591904" y="4661177"/>
+            <a:off x="6591903" y="4932202"/>
             <a:ext cx="4936028" cy="923330"/>
           </a:xfrm>
           <a:prstGeom prst="rect">
@@ -4463,6 +4880,231 @@
             <a:r>
               <a:rPr lang="en-US" b="1" dirty="0"/>
               <a:t>DA21TTB</a:t>
+            </a:r>
+          </a:p>
+        </p:txBody>
+      </p:sp>
+      <p:sp>
+        <p:nvSpPr>
+          <p:cNvPr id="10" name="Subtitle 2">
+            <a:extLst>
+              <a:ext uri="{FF2B5EF4-FFF2-40B4-BE49-F238E27FC236}">
+                <a16:creationId xmlns:a16="http://schemas.microsoft.com/office/drawing/2014/main" id="{57BE3716-01A5-6410-7020-5442BE0F3F27}"/>
+              </a:ext>
+            </a:extLst>
+          </p:cNvPr>
+          <p:cNvSpPr txBox="1">
+            <a:spLocks/>
+          </p:cNvSpPr>
+          <p:nvPr/>
+        </p:nvSpPr>
+        <p:spPr>
+          <a:xfrm>
+            <a:off x="1696324" y="193397"/>
+            <a:ext cx="8799351" cy="1038708"/>
+          </a:xfrm>
+          <a:prstGeom prst="rect">
+            <a:avLst/>
+          </a:prstGeom>
+        </p:spPr>
+        <p:txBody>
+          <a:bodyPr vert="horz" lIns="91440" tIns="45720" rIns="91440" bIns="45720" rtlCol="0">
+            <a:normAutofit/>
+          </a:bodyPr>
+          <a:lstStyle>
+            <a:lvl1pPr marL="0" indent="0" algn="ctr" defTabSz="914400" rtl="0" eaLnBrk="1" latinLnBrk="0" hangingPunct="1">
+              <a:lnSpc>
+                <a:spcPct val="90000"/>
+              </a:lnSpc>
+              <a:spcBef>
+                <a:spcPts val="1000"/>
+              </a:spcBef>
+              <a:buFont typeface="Arial" panose="020B0604020202020204" pitchFamily="34" charset="0"/>
+              <a:buNone/>
+              <a:defRPr sz="2400" kern="1200">
+                <a:solidFill>
+                  <a:schemeClr val="tx1"/>
+                </a:solidFill>
+                <a:latin typeface="+mn-lt"/>
+                <a:ea typeface="+mn-ea"/>
+                <a:cs typeface="+mn-cs"/>
+              </a:defRPr>
+            </a:lvl1pPr>
+            <a:lvl2pPr marL="457200" indent="0" algn="ctr" defTabSz="914400" rtl="0" eaLnBrk="1" latinLnBrk="0" hangingPunct="1">
+              <a:lnSpc>
+                <a:spcPct val="90000"/>
+              </a:lnSpc>
+              <a:spcBef>
+                <a:spcPts val="500"/>
+              </a:spcBef>
+              <a:buFont typeface="Arial" panose="020B0604020202020204" pitchFamily="34" charset="0"/>
+              <a:buNone/>
+              <a:defRPr sz="2000" kern="1200">
+                <a:solidFill>
+                  <a:schemeClr val="tx1"/>
+                </a:solidFill>
+                <a:latin typeface="+mn-lt"/>
+                <a:ea typeface="+mn-ea"/>
+                <a:cs typeface="+mn-cs"/>
+              </a:defRPr>
+            </a:lvl2pPr>
+            <a:lvl3pPr marL="914400" indent="0" algn="ctr" defTabSz="914400" rtl="0" eaLnBrk="1" latinLnBrk="0" hangingPunct="1">
+              <a:lnSpc>
+                <a:spcPct val="90000"/>
+              </a:lnSpc>
+              <a:spcBef>
+                <a:spcPts val="500"/>
+              </a:spcBef>
+              <a:buFont typeface="Arial" panose="020B0604020202020204" pitchFamily="34" charset="0"/>
+              <a:buNone/>
+              <a:defRPr sz="1800" kern="1200">
+                <a:solidFill>
+                  <a:schemeClr val="tx1"/>
+                </a:solidFill>
+                <a:latin typeface="+mn-lt"/>
+                <a:ea typeface="+mn-ea"/>
+                <a:cs typeface="+mn-cs"/>
+              </a:defRPr>
+            </a:lvl3pPr>
+            <a:lvl4pPr marL="1371600" indent="0" algn="ctr" defTabSz="914400" rtl="0" eaLnBrk="1" latinLnBrk="0" hangingPunct="1">
+              <a:lnSpc>
+                <a:spcPct val="90000"/>
+              </a:lnSpc>
+              <a:spcBef>
+                <a:spcPts val="500"/>
+              </a:spcBef>
+              <a:buFont typeface="Arial" panose="020B0604020202020204" pitchFamily="34" charset="0"/>
+              <a:buNone/>
+              <a:defRPr sz="1600" kern="1200">
+                <a:solidFill>
+                  <a:schemeClr val="tx1"/>
+                </a:solidFill>
+                <a:latin typeface="+mn-lt"/>
+                <a:ea typeface="+mn-ea"/>
+                <a:cs typeface="+mn-cs"/>
+              </a:defRPr>
+            </a:lvl4pPr>
+            <a:lvl5pPr marL="1828800" indent="0" algn="ctr" defTabSz="914400" rtl="0" eaLnBrk="1" latinLnBrk="0" hangingPunct="1">
+              <a:lnSpc>
+                <a:spcPct val="90000"/>
+              </a:lnSpc>
+              <a:spcBef>
+                <a:spcPts val="500"/>
+              </a:spcBef>
+              <a:buFont typeface="Arial" panose="020B0604020202020204" pitchFamily="34" charset="0"/>
+              <a:buNone/>
+              <a:defRPr sz="1600" kern="1200">
+                <a:solidFill>
+                  <a:schemeClr val="tx1"/>
+                </a:solidFill>
+                <a:latin typeface="+mn-lt"/>
+                <a:ea typeface="+mn-ea"/>
+                <a:cs typeface="+mn-cs"/>
+              </a:defRPr>
+            </a:lvl5pPr>
+            <a:lvl6pPr marL="2286000" indent="0" algn="ctr" defTabSz="914400" rtl="0" eaLnBrk="1" latinLnBrk="0" hangingPunct="1">
+              <a:lnSpc>
+                <a:spcPct val="90000"/>
+              </a:lnSpc>
+              <a:spcBef>
+                <a:spcPts val="500"/>
+              </a:spcBef>
+              <a:buFont typeface="Arial" panose="020B0604020202020204" pitchFamily="34" charset="0"/>
+              <a:buNone/>
+              <a:defRPr sz="1600" kern="1200">
+                <a:solidFill>
+                  <a:schemeClr val="tx1"/>
+                </a:solidFill>
+                <a:latin typeface="+mn-lt"/>
+                <a:ea typeface="+mn-ea"/>
+                <a:cs typeface="+mn-cs"/>
+              </a:defRPr>
+            </a:lvl6pPr>
+            <a:lvl7pPr marL="2743200" indent="0" algn="ctr" defTabSz="914400" rtl="0" eaLnBrk="1" latinLnBrk="0" hangingPunct="1">
+              <a:lnSpc>
+                <a:spcPct val="90000"/>
+              </a:lnSpc>
+              <a:spcBef>
+                <a:spcPts val="500"/>
+              </a:spcBef>
+              <a:buFont typeface="Arial" panose="020B0604020202020204" pitchFamily="34" charset="0"/>
+              <a:buNone/>
+              <a:defRPr sz="1600" kern="1200">
+                <a:solidFill>
+                  <a:schemeClr val="tx1"/>
+                </a:solidFill>
+                <a:latin typeface="+mn-lt"/>
+                <a:ea typeface="+mn-ea"/>
+                <a:cs typeface="+mn-cs"/>
+              </a:defRPr>
+            </a:lvl7pPr>
+            <a:lvl8pPr marL="3200400" indent="0" algn="ctr" defTabSz="914400" rtl="0" eaLnBrk="1" latinLnBrk="0" hangingPunct="1">
+              <a:lnSpc>
+                <a:spcPct val="90000"/>
+              </a:lnSpc>
+              <a:spcBef>
+                <a:spcPts val="500"/>
+              </a:spcBef>
+              <a:buFont typeface="Arial" panose="020B0604020202020204" pitchFamily="34" charset="0"/>
+              <a:buNone/>
+              <a:defRPr sz="1600" kern="1200">
+                <a:solidFill>
+                  <a:schemeClr val="tx1"/>
+                </a:solidFill>
+                <a:latin typeface="+mn-lt"/>
+                <a:ea typeface="+mn-ea"/>
+                <a:cs typeface="+mn-cs"/>
+              </a:defRPr>
+            </a:lvl8pPr>
+            <a:lvl9pPr marL="3657600" indent="0" algn="ctr" defTabSz="914400" rtl="0" eaLnBrk="1" latinLnBrk="0" hangingPunct="1">
+              <a:lnSpc>
+                <a:spcPct val="90000"/>
+              </a:lnSpc>
+              <a:spcBef>
+                <a:spcPts val="500"/>
+              </a:spcBef>
+              <a:buFont typeface="Arial" panose="020B0604020202020204" pitchFamily="34" charset="0"/>
+              <a:buNone/>
+              <a:defRPr sz="1600" kern="1200">
+                <a:solidFill>
+                  <a:schemeClr val="tx1"/>
+                </a:solidFill>
+                <a:latin typeface="+mn-lt"/>
+                <a:ea typeface="+mn-ea"/>
+                <a:cs typeface="+mn-cs"/>
+              </a:defRPr>
+            </a:lvl9pPr>
+          </a:lstStyle>
+          <a:p>
+            <a:pPr>
+              <a:lnSpc>
+                <a:spcPct val="100000"/>
+              </a:lnSpc>
+              <a:spcBef>
+                <a:spcPts val="0"/>
+              </a:spcBef>
+            </a:pPr>
+            <a:r>
+              <a:rPr lang="en-US" sz="2200" dirty="0">
+                <a:cs typeface="Arial" panose="020B0604020202020204" pitchFamily="34" charset="0"/>
+              </a:rPr>
+              <a:t>TRƯỜNG ĐẠI HỌC TRÀ VINH</a:t>
+            </a:r>
+          </a:p>
+          <a:p>
+            <a:pPr>
+              <a:lnSpc>
+                <a:spcPct val="100000"/>
+              </a:lnSpc>
+              <a:spcBef>
+                <a:spcPts val="0"/>
+              </a:spcBef>
+            </a:pPr>
+            <a:r>
+              <a:rPr lang="en-AU" sz="2200" b="1" dirty="0">
+                <a:cs typeface="Arial" panose="020B0604020202020204" pitchFamily="34" charset="0"/>
+              </a:rPr>
+              <a:t>TRƯỜNG KỸ THUẬT VÀ CÔNG NGHỆ</a:t>
             </a:r>
           </a:p>
         </p:txBody>
@@ -4499,56 +5141,6 @@
       </p:grpSpPr>
       <p:sp>
         <p:nvSpPr>
-          <p:cNvPr id="2" name="Title 1">
-            <a:extLst>
-              <a:ext uri="{FF2B5EF4-FFF2-40B4-BE49-F238E27FC236}">
-                <a16:creationId xmlns:a16="http://schemas.microsoft.com/office/drawing/2014/main" id="{F7E05ADA-C6FE-7E3C-F98F-CD609F2ECF89}"/>
-              </a:ext>
-            </a:extLst>
-          </p:cNvPr>
-          <p:cNvSpPr>
-            <a:spLocks noGrp="1"/>
-          </p:cNvSpPr>
-          <p:nvPr>
-            <p:ph type="title"/>
-          </p:nvPr>
-        </p:nvSpPr>
-        <p:spPr/>
-        <p:txBody>
-          <a:bodyPr/>
-          <a:lstStyle/>
-          <a:p>
-            <a:endParaRPr lang="en-AU"/>
-          </a:p>
-        </p:txBody>
-      </p:sp>
-      <p:sp>
-        <p:nvSpPr>
-          <p:cNvPr id="3" name="Content Placeholder 2">
-            <a:extLst>
-              <a:ext uri="{FF2B5EF4-FFF2-40B4-BE49-F238E27FC236}">
-                <a16:creationId xmlns:a16="http://schemas.microsoft.com/office/drawing/2014/main" id="{FA4ED27F-8F64-912E-B5E6-ED51FE482E01}"/>
-              </a:ext>
-            </a:extLst>
-          </p:cNvPr>
-          <p:cNvSpPr>
-            <a:spLocks noGrp="1"/>
-          </p:cNvSpPr>
-          <p:nvPr>
-            <p:ph idx="1"/>
-          </p:nvPr>
-        </p:nvSpPr>
-        <p:spPr/>
-        <p:txBody>
-          <a:bodyPr/>
-          <a:lstStyle/>
-          <a:p>
-            <a:endParaRPr lang="en-AU"/>
-          </a:p>
-        </p:txBody>
-      </p:sp>
-      <p:sp>
-        <p:nvSpPr>
           <p:cNvPr id="4" name="Slide Number Placeholder 3">
             <a:extLst>
               <a:ext uri="{FF2B5EF4-FFF2-40B4-BE49-F238E27FC236}">
@@ -4573,6 +5165,306 @@
               <a:t>1</a:t>
             </a:fld>
             <a:endParaRPr lang="en-AU" dirty="0"/>
+          </a:p>
+        </p:txBody>
+      </p:sp>
+      <p:pic>
+        <p:nvPicPr>
+          <p:cNvPr id="9" name="Picture 8">
+            <a:extLst>
+              <a:ext uri="{FF2B5EF4-FFF2-40B4-BE49-F238E27FC236}">
+                <a16:creationId xmlns:a16="http://schemas.microsoft.com/office/drawing/2014/main" id="{35ADE01E-C04B-268D-38A8-29187BBD785B}"/>
+              </a:ext>
+            </a:extLst>
+          </p:cNvPr>
+          <p:cNvPicPr>
+            <a:picLocks noChangeAspect="1"/>
+          </p:cNvPicPr>
+          <p:nvPr/>
+        </p:nvPicPr>
+        <p:blipFill>
+          <a:blip r:embed="rId3">
+            <a:extLst>
+              <a:ext uri="{28A0092B-C50C-407E-A947-70E740481C1C}">
+                <a14:useLocalDpi xmlns:a14="http://schemas.microsoft.com/office/drawing/2010/main" val="0"/>
+              </a:ext>
+            </a:extLst>
+          </a:blip>
+          <a:srcRect t="-1" r="70983" b="88753"/>
+          <a:stretch>
+            <a:fillRect/>
+          </a:stretch>
+        </p:blipFill>
+        <p:spPr>
+          <a:xfrm>
+            <a:off x="0" y="949333"/>
+            <a:ext cx="3121950" cy="91440"/>
+          </a:xfrm>
+          <a:prstGeom prst="rect">
+            <a:avLst/>
+          </a:prstGeom>
+        </p:spPr>
+      </p:pic>
+      <p:sp>
+        <p:nvSpPr>
+          <p:cNvPr id="11" name="TextBox 10">
+            <a:extLst>
+              <a:ext uri="{FF2B5EF4-FFF2-40B4-BE49-F238E27FC236}">
+                <a16:creationId xmlns:a16="http://schemas.microsoft.com/office/drawing/2014/main" id="{ED4B9551-2363-70A4-AD2B-5FCB6A76ECBF}"/>
+              </a:ext>
+            </a:extLst>
+          </p:cNvPr>
+          <p:cNvSpPr txBox="1"/>
+          <p:nvPr/>
+        </p:nvSpPr>
+        <p:spPr>
+          <a:xfrm>
+            <a:off x="134696" y="364558"/>
+            <a:ext cx="2446867" cy="584775"/>
+          </a:xfrm>
+          <a:prstGeom prst="rect">
+            <a:avLst/>
+          </a:prstGeom>
+          <a:noFill/>
+        </p:spPr>
+        <p:txBody>
+          <a:bodyPr wrap="square" rtlCol="0">
+            <a:spAutoFit/>
+          </a:bodyPr>
+          <a:lstStyle/>
+          <a:p>
+            <a:r>
+              <a:rPr lang="en-US" sz="3200" b="1" dirty="0">
+                <a:latin typeface="Arial" panose="020B0604020202020204" pitchFamily="34" charset="0"/>
+                <a:cs typeface="Arial" panose="020B0604020202020204" pitchFamily="34" charset="0"/>
+              </a:rPr>
+              <a:t>NỘI DUNG</a:t>
+            </a:r>
+          </a:p>
+        </p:txBody>
+      </p:sp>
+      <p:sp>
+        <p:nvSpPr>
+          <p:cNvPr id="12" name="TextBox 11">
+            <a:extLst>
+              <a:ext uri="{FF2B5EF4-FFF2-40B4-BE49-F238E27FC236}">
+                <a16:creationId xmlns:a16="http://schemas.microsoft.com/office/drawing/2014/main" id="{EB2300F8-68F9-FF45-3619-3FF5ED960370}"/>
+              </a:ext>
+            </a:extLst>
+          </p:cNvPr>
+          <p:cNvSpPr txBox="1"/>
+          <p:nvPr/>
+        </p:nvSpPr>
+        <p:spPr>
+          <a:xfrm>
+            <a:off x="1358128" y="1832942"/>
+            <a:ext cx="7595371" cy="400110"/>
+          </a:xfrm>
+          <a:prstGeom prst="rect">
+            <a:avLst/>
+          </a:prstGeom>
+          <a:noFill/>
+        </p:spPr>
+        <p:txBody>
+          <a:bodyPr wrap="square" rtlCol="0">
+            <a:spAutoFit/>
+          </a:bodyPr>
+          <a:lstStyle/>
+          <a:p>
+            <a:r>
+              <a:rPr lang="en-US" sz="2000" b="1" dirty="0">
+                <a:latin typeface="Arial" panose="020B0604020202020204" pitchFamily="34" charset="0"/>
+                <a:cs typeface="Arial" panose="020B0604020202020204" pitchFamily="34" charset="0"/>
+              </a:rPr>
+              <a:t>I.</a:t>
+            </a:r>
+            <a:r>
+              <a:rPr lang="en-US" sz="2000" dirty="0">
+                <a:latin typeface="Arial" panose="020B0604020202020204" pitchFamily="34" charset="0"/>
+                <a:cs typeface="Arial" panose="020B0604020202020204" pitchFamily="34" charset="0"/>
+              </a:rPr>
+              <a:t> TỔNG QUAN ĐỀ TÀI</a:t>
+            </a:r>
+          </a:p>
+        </p:txBody>
+      </p:sp>
+      <p:sp>
+        <p:nvSpPr>
+          <p:cNvPr id="13" name="TextBox 12">
+            <a:extLst>
+              <a:ext uri="{FF2B5EF4-FFF2-40B4-BE49-F238E27FC236}">
+                <a16:creationId xmlns:a16="http://schemas.microsoft.com/office/drawing/2014/main" id="{432E0572-74B2-B064-B929-63F9F2D7D9CC}"/>
+              </a:ext>
+            </a:extLst>
+          </p:cNvPr>
+          <p:cNvSpPr txBox="1"/>
+          <p:nvPr/>
+        </p:nvSpPr>
+        <p:spPr>
+          <a:xfrm>
+            <a:off x="1358129" y="2633162"/>
+            <a:ext cx="8081146" cy="400110"/>
+          </a:xfrm>
+          <a:prstGeom prst="rect">
+            <a:avLst/>
+          </a:prstGeom>
+          <a:noFill/>
+        </p:spPr>
+        <p:txBody>
+          <a:bodyPr wrap="square" rtlCol="0">
+            <a:spAutoFit/>
+          </a:bodyPr>
+          <a:lstStyle/>
+          <a:p>
+            <a:r>
+              <a:rPr lang="en-US" sz="2000" b="1" dirty="0">
+                <a:latin typeface="Arial" panose="020B0604020202020204" pitchFamily="34" charset="0"/>
+                <a:cs typeface="Arial" panose="020B0604020202020204" pitchFamily="34" charset="0"/>
+              </a:rPr>
+              <a:t>II.</a:t>
+            </a:r>
+            <a:r>
+              <a:rPr lang="en-US" sz="2000" dirty="0">
+                <a:latin typeface="Arial" panose="020B0604020202020204" pitchFamily="34" charset="0"/>
+                <a:cs typeface="Arial" panose="020B0604020202020204" pitchFamily="34" charset="0"/>
+              </a:rPr>
+              <a:t> CƠ SỞ LÝ THUYẾT</a:t>
+            </a:r>
+          </a:p>
+        </p:txBody>
+      </p:sp>
+      <p:sp>
+        <p:nvSpPr>
+          <p:cNvPr id="14" name="TextBox 13">
+            <a:extLst>
+              <a:ext uri="{FF2B5EF4-FFF2-40B4-BE49-F238E27FC236}">
+                <a16:creationId xmlns:a16="http://schemas.microsoft.com/office/drawing/2014/main" id="{9452B722-7DB6-7448-59F4-54697242BB83}"/>
+              </a:ext>
+            </a:extLst>
+          </p:cNvPr>
+          <p:cNvSpPr txBox="1"/>
+          <p:nvPr/>
+        </p:nvSpPr>
+        <p:spPr>
+          <a:xfrm>
+            <a:off x="1358129" y="4233602"/>
+            <a:ext cx="8509771" cy="400110"/>
+          </a:xfrm>
+          <a:prstGeom prst="rect">
+            <a:avLst/>
+          </a:prstGeom>
+          <a:noFill/>
+        </p:spPr>
+        <p:txBody>
+          <a:bodyPr wrap="square" rtlCol="0">
+            <a:spAutoFit/>
+          </a:bodyPr>
+          <a:lstStyle/>
+          <a:p>
+            <a:r>
+              <a:rPr lang="en-US" sz="2000" b="1" dirty="0">
+                <a:latin typeface="Arial" panose="020B0604020202020204" pitchFamily="34" charset="0"/>
+                <a:cs typeface="Arial" panose="020B0604020202020204" pitchFamily="34" charset="0"/>
+              </a:rPr>
+              <a:t>IV.</a:t>
+            </a:r>
+            <a:r>
+              <a:rPr lang="en-US" sz="2000" dirty="0">
+                <a:latin typeface="Arial" panose="020B0604020202020204" pitchFamily="34" charset="0"/>
+                <a:cs typeface="Arial" panose="020B0604020202020204" pitchFamily="34" charset="0"/>
+              </a:rPr>
+              <a:t> XÂY DỰNG ỨNG DỤNG THỬ NGHIỆM</a:t>
+            </a:r>
+          </a:p>
+        </p:txBody>
+      </p:sp>
+      <p:sp>
+        <p:nvSpPr>
+          <p:cNvPr id="15" name="TextBox 14">
+            <a:extLst>
+              <a:ext uri="{FF2B5EF4-FFF2-40B4-BE49-F238E27FC236}">
+                <a16:creationId xmlns:a16="http://schemas.microsoft.com/office/drawing/2014/main" id="{26461347-FAD6-D020-C1F5-D34FF6B49154}"/>
+              </a:ext>
+            </a:extLst>
+          </p:cNvPr>
+          <p:cNvSpPr txBox="1"/>
+          <p:nvPr/>
+        </p:nvSpPr>
+        <p:spPr>
+          <a:xfrm>
+            <a:off x="1358129" y="3433382"/>
+            <a:ext cx="7766821" cy="400110"/>
+          </a:xfrm>
+          <a:prstGeom prst="rect">
+            <a:avLst/>
+          </a:prstGeom>
+          <a:noFill/>
+        </p:spPr>
+        <p:txBody>
+          <a:bodyPr wrap="square" rtlCol="0">
+            <a:spAutoFit/>
+          </a:bodyPr>
+          <a:lstStyle/>
+          <a:p>
+            <a:r>
+              <a:rPr lang="en-US" sz="2000" b="1" dirty="0">
+                <a:latin typeface="Arial" panose="020B0604020202020204" pitchFamily="34" charset="0"/>
+                <a:cs typeface="Arial" panose="020B0604020202020204" pitchFamily="34" charset="0"/>
+              </a:rPr>
+              <a:t>III.</a:t>
+            </a:r>
+            <a:r>
+              <a:rPr lang="en-US" sz="2000" dirty="0">
+                <a:latin typeface="Arial" panose="020B0604020202020204" pitchFamily="34" charset="0"/>
+                <a:cs typeface="Arial" panose="020B0604020202020204" pitchFamily="34" charset="0"/>
+              </a:rPr>
+              <a:t> HUẤN LUYỆN MÔ HÌNH</a:t>
+            </a:r>
+          </a:p>
+        </p:txBody>
+      </p:sp>
+      <p:sp>
+        <p:nvSpPr>
+          <p:cNvPr id="16" name="TextBox 15">
+            <a:extLst>
+              <a:ext uri="{FF2B5EF4-FFF2-40B4-BE49-F238E27FC236}">
+                <a16:creationId xmlns:a16="http://schemas.microsoft.com/office/drawing/2014/main" id="{A2500CDA-9E3B-9575-1F05-A0345277871D}"/>
+              </a:ext>
+            </a:extLst>
+          </p:cNvPr>
+          <p:cNvSpPr txBox="1"/>
+          <p:nvPr/>
+        </p:nvSpPr>
+        <p:spPr>
+          <a:xfrm>
+            <a:off x="1358129" y="5034836"/>
+            <a:ext cx="7766820" cy="400110"/>
+          </a:xfrm>
+          <a:prstGeom prst="rect">
+            <a:avLst/>
+          </a:prstGeom>
+          <a:noFill/>
+        </p:spPr>
+        <p:txBody>
+          <a:bodyPr wrap="square" rtlCol="0">
+            <a:spAutoFit/>
+          </a:bodyPr>
+          <a:lstStyle/>
+          <a:p>
+            <a:r>
+              <a:rPr lang="en-US" sz="2000" b="1" dirty="0">
+                <a:latin typeface="Arial" panose="020B0604020202020204" pitchFamily="34" charset="0"/>
+                <a:cs typeface="Arial" panose="020B0604020202020204" pitchFamily="34" charset="0"/>
+              </a:rPr>
+              <a:t>V.</a:t>
+            </a:r>
+            <a:r>
+              <a:rPr lang="en-US" sz="2000" dirty="0">
+                <a:latin typeface="Arial" panose="020B0604020202020204" pitchFamily="34" charset="0"/>
+                <a:cs typeface="Arial" panose="020B0604020202020204" pitchFamily="34" charset="0"/>
+              </a:rPr>
+              <a:t> KẾT LUẬN VÀ HƯỚNG PHÁT TRIỂN</a:t>
+            </a:r>
           </a:p>
         </p:txBody>
       </p:sp>
@@ -4594,7 +5486,13 @@
   <p:cSld>
     <p:spTree>
       <p:nvGrpSpPr>
-        <p:cNvPr id="1" name=""/>
+        <p:cNvPr id="1" name="">
+          <a:extLst>
+            <a:ext uri="{FF2B5EF4-FFF2-40B4-BE49-F238E27FC236}">
+              <a16:creationId xmlns:a16="http://schemas.microsoft.com/office/drawing/2014/main" id="{196BBB80-9CEB-0966-664B-BE49E3B6ECB9}"/>
+            </a:ext>
+          </a:extLst>
+        </p:cNvPr>
         <p:cNvGrpSpPr/>
         <p:nvPr/>
       </p:nvGrpSpPr>
@@ -4608,60 +5506,10 @@
       </p:grpSpPr>
       <p:sp>
         <p:nvSpPr>
-          <p:cNvPr id="2" name="Title 1">
-            <a:extLst>
-              <a:ext uri="{FF2B5EF4-FFF2-40B4-BE49-F238E27FC236}">
-                <a16:creationId xmlns:a16="http://schemas.microsoft.com/office/drawing/2014/main" id="{2ABC8FD9-103C-BE3A-DC56-FCE5C130EE3C}"/>
-              </a:ext>
-            </a:extLst>
-          </p:cNvPr>
-          <p:cNvSpPr>
-            <a:spLocks noGrp="1"/>
-          </p:cNvSpPr>
-          <p:nvPr>
-            <p:ph type="title"/>
-          </p:nvPr>
-        </p:nvSpPr>
-        <p:spPr/>
-        <p:txBody>
-          <a:bodyPr/>
-          <a:lstStyle/>
-          <a:p>
-            <a:endParaRPr lang="en-AU"/>
-          </a:p>
-        </p:txBody>
-      </p:sp>
-      <p:sp>
-        <p:nvSpPr>
-          <p:cNvPr id="3" name="Content Placeholder 2">
-            <a:extLst>
-              <a:ext uri="{FF2B5EF4-FFF2-40B4-BE49-F238E27FC236}">
-                <a16:creationId xmlns:a16="http://schemas.microsoft.com/office/drawing/2014/main" id="{D22C0E4A-F8CF-AE9A-F542-F479F48FCFD9}"/>
-              </a:ext>
-            </a:extLst>
-          </p:cNvPr>
-          <p:cNvSpPr>
-            <a:spLocks noGrp="1"/>
-          </p:cNvSpPr>
-          <p:nvPr>
-            <p:ph idx="1"/>
-          </p:nvPr>
-        </p:nvSpPr>
-        <p:spPr/>
-        <p:txBody>
-          <a:bodyPr/>
-          <a:lstStyle/>
-          <a:p>
-            <a:endParaRPr lang="en-AU"/>
-          </a:p>
-        </p:txBody>
-      </p:sp>
-      <p:sp>
-        <p:nvSpPr>
           <p:cNvPr id="4" name="Slide Number Placeholder 3">
             <a:extLst>
               <a:ext uri="{FF2B5EF4-FFF2-40B4-BE49-F238E27FC236}">
-                <a16:creationId xmlns:a16="http://schemas.microsoft.com/office/drawing/2014/main" id="{00703480-3D47-C275-5CC9-E696F7FEAF71}"/>
+                <a16:creationId xmlns:a16="http://schemas.microsoft.com/office/drawing/2014/main" id="{92846F36-3B87-7255-4A45-F439C388A6F7}"/>
               </a:ext>
             </a:extLst>
           </p:cNvPr>
@@ -4681,14 +5529,2473 @@
               <a:rPr lang="en-AU" smtClean="0"/>
               <a:t>2</a:t>
             </a:fld>
-            <a:endParaRPr lang="en-AU"/>
+            <a:endParaRPr lang="en-AU" dirty="0"/>
+          </a:p>
+        </p:txBody>
+      </p:sp>
+      <p:sp>
+        <p:nvSpPr>
+          <p:cNvPr id="11" name="TextBox 10">
+            <a:extLst>
+              <a:ext uri="{FF2B5EF4-FFF2-40B4-BE49-F238E27FC236}">
+                <a16:creationId xmlns:a16="http://schemas.microsoft.com/office/drawing/2014/main" id="{8C09D276-A6F2-D652-43BC-43CCBB1315DB}"/>
+              </a:ext>
+            </a:extLst>
+          </p:cNvPr>
+          <p:cNvSpPr txBox="1"/>
+          <p:nvPr/>
+        </p:nvSpPr>
+        <p:spPr>
+          <a:xfrm>
+            <a:off x="134696" y="364558"/>
+            <a:ext cx="11657254" cy="584775"/>
+          </a:xfrm>
+          <a:prstGeom prst="rect">
+            <a:avLst/>
+          </a:prstGeom>
+          <a:noFill/>
+        </p:spPr>
+        <p:txBody>
+          <a:bodyPr wrap="square" rtlCol="0">
+            <a:spAutoFit/>
+          </a:bodyPr>
+          <a:lstStyle/>
+          <a:p>
+            <a:r>
+              <a:rPr lang="en-US" sz="3200" b="1" dirty="0">
+                <a:latin typeface="Arial" panose="020B0604020202020204" pitchFamily="34" charset="0"/>
+                <a:cs typeface="Arial" panose="020B0604020202020204" pitchFamily="34" charset="0"/>
+              </a:rPr>
+              <a:t>I. TỔNG QUAN ĐỀ TÀI</a:t>
+            </a:r>
+          </a:p>
+        </p:txBody>
+      </p:sp>
+      <p:sp>
+        <p:nvSpPr>
+          <p:cNvPr id="12" name="TextBox 11">
+            <a:extLst>
+              <a:ext uri="{FF2B5EF4-FFF2-40B4-BE49-F238E27FC236}">
+                <a16:creationId xmlns:a16="http://schemas.microsoft.com/office/drawing/2014/main" id="{F571DFC1-398B-0B65-C13A-F8CE6F01FD81}"/>
+              </a:ext>
+            </a:extLst>
+          </p:cNvPr>
+          <p:cNvSpPr txBox="1"/>
+          <p:nvPr/>
+        </p:nvSpPr>
+        <p:spPr>
+          <a:xfrm>
+            <a:off x="134696" y="1237610"/>
+            <a:ext cx="7595371" cy="400110"/>
+          </a:xfrm>
+          <a:prstGeom prst="rect">
+            <a:avLst/>
+          </a:prstGeom>
+          <a:noFill/>
+        </p:spPr>
+        <p:txBody>
+          <a:bodyPr wrap="square" rtlCol="0">
+            <a:spAutoFit/>
+          </a:bodyPr>
+          <a:lstStyle/>
+          <a:p>
+            <a:r>
+              <a:rPr lang="en-US" sz="2000" b="1" dirty="0">
+                <a:latin typeface="Arial" panose="020B0604020202020204" pitchFamily="34" charset="0"/>
+                <a:cs typeface="Arial" panose="020B0604020202020204" pitchFamily="34" charset="0"/>
+              </a:rPr>
+              <a:t>1.1. Lý do </a:t>
+            </a:r>
+            <a:r>
+              <a:rPr lang="en-US" sz="2000" b="1" dirty="0" err="1">
+                <a:latin typeface="Arial" panose="020B0604020202020204" pitchFamily="34" charset="0"/>
+                <a:cs typeface="Arial" panose="020B0604020202020204" pitchFamily="34" charset="0"/>
+              </a:rPr>
+              <a:t>chọn</a:t>
+            </a:r>
+            <a:r>
+              <a:rPr lang="en-US" sz="2000" b="1" dirty="0">
+                <a:latin typeface="Arial" panose="020B0604020202020204" pitchFamily="34" charset="0"/>
+                <a:cs typeface="Arial" panose="020B0604020202020204" pitchFamily="34" charset="0"/>
+              </a:rPr>
+              <a:t> </a:t>
+            </a:r>
+            <a:r>
+              <a:rPr lang="en-US" sz="2000" b="1" dirty="0" err="1">
+                <a:latin typeface="Arial" panose="020B0604020202020204" pitchFamily="34" charset="0"/>
+                <a:cs typeface="Arial" panose="020B0604020202020204" pitchFamily="34" charset="0"/>
+              </a:rPr>
+              <a:t>đề</a:t>
+            </a:r>
+            <a:r>
+              <a:rPr lang="en-US" sz="2000" b="1" dirty="0">
+                <a:latin typeface="Arial" panose="020B0604020202020204" pitchFamily="34" charset="0"/>
+                <a:cs typeface="Arial" panose="020B0604020202020204" pitchFamily="34" charset="0"/>
+              </a:rPr>
+              <a:t> </a:t>
+            </a:r>
+            <a:r>
+              <a:rPr lang="en-US" sz="2000" b="1" dirty="0" err="1">
+                <a:latin typeface="Arial" panose="020B0604020202020204" pitchFamily="34" charset="0"/>
+                <a:cs typeface="Arial" panose="020B0604020202020204" pitchFamily="34" charset="0"/>
+              </a:rPr>
+              <a:t>tài</a:t>
+            </a:r>
+            <a:endParaRPr lang="en-US" sz="2000" b="1" dirty="0">
+              <a:latin typeface="Arial" panose="020B0604020202020204" pitchFamily="34" charset="0"/>
+              <a:cs typeface="Arial" panose="020B0604020202020204" pitchFamily="34" charset="0"/>
+            </a:endParaRPr>
+          </a:p>
+        </p:txBody>
+      </p:sp>
+      <p:pic>
+        <p:nvPicPr>
+          <p:cNvPr id="2" name="Picture 1">
+            <a:extLst>
+              <a:ext uri="{FF2B5EF4-FFF2-40B4-BE49-F238E27FC236}">
+                <a16:creationId xmlns:a16="http://schemas.microsoft.com/office/drawing/2014/main" id="{21BAE425-9057-761A-DD1A-A51FDAC16C1E}"/>
+              </a:ext>
+            </a:extLst>
+          </p:cNvPr>
+          <p:cNvPicPr>
+            <a:picLocks noChangeAspect="1"/>
+          </p:cNvPicPr>
+          <p:nvPr/>
+        </p:nvPicPr>
+        <p:blipFill>
+          <a:blip r:embed="rId3">
+            <a:extLst>
+              <a:ext uri="{28A0092B-C50C-407E-A947-70E740481C1C}">
+                <a14:useLocalDpi xmlns:a14="http://schemas.microsoft.com/office/drawing/2010/main" val="0"/>
+              </a:ext>
+            </a:extLst>
+          </a:blip>
+          <a:srcRect t="-1" r="70983" b="88753"/>
+          <a:stretch>
+            <a:fillRect/>
+          </a:stretch>
+        </p:blipFill>
+        <p:spPr>
+          <a:xfrm>
+            <a:off x="0" y="949333"/>
+            <a:ext cx="3121950" cy="91440"/>
+          </a:xfrm>
+          <a:prstGeom prst="rect">
+            <a:avLst/>
+          </a:prstGeom>
+        </p:spPr>
+      </p:pic>
+      <p:sp>
+        <p:nvSpPr>
+          <p:cNvPr id="3" name="TextBox 2">
+            <a:extLst>
+              <a:ext uri="{FF2B5EF4-FFF2-40B4-BE49-F238E27FC236}">
+                <a16:creationId xmlns:a16="http://schemas.microsoft.com/office/drawing/2014/main" id="{4FBFCB67-06DD-FF86-971D-B6D79528B546}"/>
+              </a:ext>
+            </a:extLst>
+          </p:cNvPr>
+          <p:cNvSpPr txBox="1"/>
+          <p:nvPr/>
+        </p:nvSpPr>
+        <p:spPr>
+          <a:xfrm>
+            <a:off x="485775" y="1834557"/>
+            <a:ext cx="3181350" cy="4473991"/>
+          </a:xfrm>
+          <a:prstGeom prst="roundRect">
+            <a:avLst/>
+          </a:prstGeom>
+          <a:ln>
+            <a:solidFill>
+              <a:schemeClr val="tx2">
+                <a:lumMod val="75000"/>
+                <a:lumOff val="25000"/>
+              </a:schemeClr>
+            </a:solidFill>
+          </a:ln>
+        </p:spPr>
+        <p:style>
+          <a:lnRef idx="2">
+            <a:schemeClr val="accent4"/>
+          </a:lnRef>
+          <a:fillRef idx="1">
+            <a:schemeClr val="lt1"/>
+          </a:fillRef>
+          <a:effectRef idx="0">
+            <a:schemeClr val="accent4"/>
+          </a:effectRef>
+          <a:fontRef idx="minor">
+            <a:schemeClr val="dk1"/>
+          </a:fontRef>
+        </p:style>
+        <p:txBody>
+          <a:bodyPr wrap="square" rtlCol="0">
+            <a:spAutoFit/>
+          </a:bodyPr>
+          <a:lstStyle/>
+          <a:p>
+            <a:pPr algn="just">
+              <a:lnSpc>
+                <a:spcPct val="150000"/>
+              </a:lnSpc>
+            </a:pPr>
+            <a:r>
+              <a:rPr lang="en-US" sz="2000" dirty="0">
+                <a:latin typeface="Arial" panose="020B0604020202020204" pitchFamily="34" charset="0"/>
+                <a:cs typeface="Arial" panose="020B0604020202020204" pitchFamily="34" charset="0"/>
+              </a:rPr>
+              <a:t>V</a:t>
+            </a:r>
+            <a:r>
+              <a:rPr lang="vi-VN" sz="2000" dirty="0">
+                <a:latin typeface="Arial" panose="020B0604020202020204" pitchFamily="34" charset="0"/>
+                <a:cs typeface="Arial" panose="020B0604020202020204" pitchFamily="34" charset="0"/>
+              </a:rPr>
+              <a:t>ới sự phát triển mạnh mẽ của các nền tảng thương mại điện tử</a:t>
+            </a:r>
+            <a:r>
+              <a:rPr lang="en-US" sz="2000" dirty="0">
+                <a:latin typeface="Arial" panose="020B0604020202020204" pitchFamily="34" charset="0"/>
+                <a:cs typeface="Arial" panose="020B0604020202020204" pitchFamily="34" charset="0"/>
+              </a:rPr>
+              <a:t>, </a:t>
+            </a:r>
+            <a:r>
+              <a:rPr lang="en-US" sz="2000" dirty="0" err="1">
+                <a:latin typeface="Arial" panose="020B0604020202020204" pitchFamily="34" charset="0"/>
+                <a:cs typeface="Arial" panose="020B0604020202020204" pitchFamily="34" charset="0"/>
+              </a:rPr>
+              <a:t>người</a:t>
+            </a:r>
+            <a:r>
+              <a:rPr lang="en-US" sz="2000" dirty="0">
+                <a:latin typeface="Arial" panose="020B0604020202020204" pitchFamily="34" charset="0"/>
+                <a:cs typeface="Arial" panose="020B0604020202020204" pitchFamily="34" charset="0"/>
+              </a:rPr>
+              <a:t> </a:t>
+            </a:r>
+            <a:r>
+              <a:rPr lang="en-US" sz="2000" dirty="0" err="1">
+                <a:latin typeface="Arial" panose="020B0604020202020204" pitchFamily="34" charset="0"/>
+                <a:cs typeface="Arial" panose="020B0604020202020204" pitchFamily="34" charset="0"/>
+              </a:rPr>
+              <a:t>tiêu</a:t>
+            </a:r>
+            <a:r>
+              <a:rPr lang="en-US" sz="2000" dirty="0">
+                <a:latin typeface="Arial" panose="020B0604020202020204" pitchFamily="34" charset="0"/>
+                <a:cs typeface="Arial" panose="020B0604020202020204" pitchFamily="34" charset="0"/>
+              </a:rPr>
+              <a:t> </a:t>
+            </a:r>
+            <a:r>
+              <a:rPr lang="en-US" sz="2000" dirty="0" err="1">
+                <a:latin typeface="Arial" panose="020B0604020202020204" pitchFamily="34" charset="0"/>
+                <a:cs typeface="Arial" panose="020B0604020202020204" pitchFamily="34" charset="0"/>
+              </a:rPr>
+              <a:t>dùng</a:t>
+            </a:r>
+            <a:r>
+              <a:rPr lang="en-US" sz="2000" dirty="0">
+                <a:latin typeface="Arial" panose="020B0604020202020204" pitchFamily="34" charset="0"/>
+                <a:cs typeface="Arial" panose="020B0604020202020204" pitchFamily="34" charset="0"/>
+              </a:rPr>
+              <a:t> </a:t>
+            </a:r>
+            <a:r>
+              <a:rPr lang="en-US" sz="2000" dirty="0" err="1">
+                <a:latin typeface="Arial" panose="020B0604020202020204" pitchFamily="34" charset="0"/>
+                <a:cs typeface="Arial" panose="020B0604020202020204" pitchFamily="34" charset="0"/>
+              </a:rPr>
+              <a:t>có</a:t>
+            </a:r>
+            <a:r>
+              <a:rPr lang="en-US" sz="2000" dirty="0">
+                <a:latin typeface="Arial" panose="020B0604020202020204" pitchFamily="34" charset="0"/>
+                <a:cs typeface="Arial" panose="020B0604020202020204" pitchFamily="34" charset="0"/>
+              </a:rPr>
+              <a:t> xu </a:t>
+            </a:r>
+            <a:r>
+              <a:rPr lang="en-US" sz="2000" dirty="0" err="1">
+                <a:latin typeface="Arial" panose="020B0604020202020204" pitchFamily="34" charset="0"/>
+                <a:cs typeface="Arial" panose="020B0604020202020204" pitchFamily="34" charset="0"/>
+              </a:rPr>
+              <a:t>hướng</a:t>
+            </a:r>
+            <a:r>
+              <a:rPr lang="en-US" sz="2000" dirty="0">
+                <a:latin typeface="Arial" panose="020B0604020202020204" pitchFamily="34" charset="0"/>
+                <a:cs typeface="Arial" panose="020B0604020202020204" pitchFamily="34" charset="0"/>
+              </a:rPr>
+              <a:t> </a:t>
+            </a:r>
+            <a:r>
+              <a:rPr lang="en-US" sz="2000" dirty="0" err="1">
+                <a:latin typeface="Arial" panose="020B0604020202020204" pitchFamily="34" charset="0"/>
+                <a:cs typeface="Arial" panose="020B0604020202020204" pitchFamily="34" charset="0"/>
+              </a:rPr>
+              <a:t>chuyển</a:t>
+            </a:r>
+            <a:r>
+              <a:rPr lang="en-US" sz="2000" dirty="0">
+                <a:latin typeface="Arial" panose="020B0604020202020204" pitchFamily="34" charset="0"/>
+                <a:cs typeface="Arial" panose="020B0604020202020204" pitchFamily="34" charset="0"/>
+              </a:rPr>
+              <a:t> </a:t>
+            </a:r>
+            <a:r>
+              <a:rPr lang="en-US" sz="2000" dirty="0" err="1">
+                <a:latin typeface="Arial" panose="020B0604020202020204" pitchFamily="34" charset="0"/>
+                <a:cs typeface="Arial" panose="020B0604020202020204" pitchFamily="34" charset="0"/>
+              </a:rPr>
+              <a:t>từ</a:t>
+            </a:r>
+            <a:r>
+              <a:rPr lang="en-US" sz="2000" dirty="0">
+                <a:latin typeface="Arial" panose="020B0604020202020204" pitchFamily="34" charset="0"/>
+                <a:cs typeface="Arial" panose="020B0604020202020204" pitchFamily="34" charset="0"/>
+              </a:rPr>
+              <a:t> </a:t>
+            </a:r>
+            <a:r>
+              <a:rPr lang="en-US" sz="2000" dirty="0" err="1">
+                <a:latin typeface="Arial" panose="020B0604020202020204" pitchFamily="34" charset="0"/>
+                <a:cs typeface="Arial" panose="020B0604020202020204" pitchFamily="34" charset="0"/>
+              </a:rPr>
+              <a:t>mua</a:t>
+            </a:r>
+            <a:r>
+              <a:rPr lang="en-US" sz="2000" dirty="0">
+                <a:latin typeface="Arial" panose="020B0604020202020204" pitchFamily="34" charset="0"/>
+                <a:cs typeface="Arial" panose="020B0604020202020204" pitchFamily="34" charset="0"/>
+              </a:rPr>
+              <a:t> </a:t>
+            </a:r>
+            <a:r>
+              <a:rPr lang="en-US" sz="2000" dirty="0" err="1">
+                <a:latin typeface="Arial" panose="020B0604020202020204" pitchFamily="34" charset="0"/>
+                <a:cs typeface="Arial" panose="020B0604020202020204" pitchFamily="34" charset="0"/>
+              </a:rPr>
+              <a:t>sắm</a:t>
+            </a:r>
+            <a:r>
+              <a:rPr lang="en-US" sz="2000" dirty="0">
+                <a:latin typeface="Arial" panose="020B0604020202020204" pitchFamily="34" charset="0"/>
+                <a:cs typeface="Arial" panose="020B0604020202020204" pitchFamily="34" charset="0"/>
+              </a:rPr>
+              <a:t> </a:t>
+            </a:r>
+            <a:r>
+              <a:rPr lang="en-US" sz="2000" dirty="0" err="1">
+                <a:latin typeface="Arial" panose="020B0604020202020204" pitchFamily="34" charset="0"/>
+                <a:cs typeface="Arial" panose="020B0604020202020204" pitchFamily="34" charset="0"/>
+              </a:rPr>
+              <a:t>trực</a:t>
+            </a:r>
+            <a:r>
+              <a:rPr lang="en-US" sz="2000" dirty="0">
+                <a:latin typeface="Arial" panose="020B0604020202020204" pitchFamily="34" charset="0"/>
+                <a:cs typeface="Arial" panose="020B0604020202020204" pitchFamily="34" charset="0"/>
+              </a:rPr>
+              <a:t> </a:t>
+            </a:r>
+            <a:r>
+              <a:rPr lang="en-US" sz="2000" dirty="0" err="1">
+                <a:latin typeface="Arial" panose="020B0604020202020204" pitchFamily="34" charset="0"/>
+                <a:cs typeface="Arial" panose="020B0604020202020204" pitchFamily="34" charset="0"/>
+              </a:rPr>
+              <a:t>tiếp</a:t>
+            </a:r>
+            <a:r>
+              <a:rPr lang="en-US" sz="2000" dirty="0">
+                <a:latin typeface="Arial" panose="020B0604020202020204" pitchFamily="34" charset="0"/>
+                <a:cs typeface="Arial" panose="020B0604020202020204" pitchFamily="34" charset="0"/>
+              </a:rPr>
+              <a:t> sang </a:t>
+            </a:r>
+            <a:r>
+              <a:rPr lang="en-US" sz="2000" dirty="0" err="1">
+                <a:latin typeface="Arial" panose="020B0604020202020204" pitchFamily="34" charset="0"/>
+                <a:cs typeface="Arial" panose="020B0604020202020204" pitchFamily="34" charset="0"/>
+              </a:rPr>
+              <a:t>mua</a:t>
+            </a:r>
+            <a:r>
+              <a:rPr lang="en-US" sz="2000" dirty="0">
+                <a:latin typeface="Arial" panose="020B0604020202020204" pitchFamily="34" charset="0"/>
+                <a:cs typeface="Arial" panose="020B0604020202020204" pitchFamily="34" charset="0"/>
+              </a:rPr>
+              <a:t> </a:t>
+            </a:r>
+            <a:r>
+              <a:rPr lang="en-US" sz="2000" dirty="0" err="1">
+                <a:latin typeface="Arial" panose="020B0604020202020204" pitchFamily="34" charset="0"/>
+                <a:cs typeface="Arial" panose="020B0604020202020204" pitchFamily="34" charset="0"/>
+              </a:rPr>
+              <a:t>sắm</a:t>
+            </a:r>
+            <a:r>
+              <a:rPr lang="en-US" sz="2000" dirty="0">
+                <a:latin typeface="Arial" panose="020B0604020202020204" pitchFamily="34" charset="0"/>
+                <a:cs typeface="Arial" panose="020B0604020202020204" pitchFamily="34" charset="0"/>
+              </a:rPr>
+              <a:t> </a:t>
+            </a:r>
+            <a:r>
+              <a:rPr lang="en-US" sz="2000" dirty="0" err="1">
+                <a:latin typeface="Arial" panose="020B0604020202020204" pitchFamily="34" charset="0"/>
+                <a:cs typeface="Arial" panose="020B0604020202020204" pitchFamily="34" charset="0"/>
+              </a:rPr>
+              <a:t>trực</a:t>
+            </a:r>
+            <a:r>
+              <a:rPr lang="en-US" sz="2000" dirty="0">
+                <a:latin typeface="Arial" panose="020B0604020202020204" pitchFamily="34" charset="0"/>
+                <a:cs typeface="Arial" panose="020B0604020202020204" pitchFamily="34" charset="0"/>
+              </a:rPr>
+              <a:t> </a:t>
+            </a:r>
+            <a:r>
+              <a:rPr lang="en-US" sz="2000" dirty="0" err="1">
+                <a:latin typeface="Arial" panose="020B0604020202020204" pitchFamily="34" charset="0"/>
+                <a:cs typeface="Arial" panose="020B0604020202020204" pitchFamily="34" charset="0"/>
+              </a:rPr>
+              <a:t>tuyến</a:t>
+            </a:r>
+            <a:r>
+              <a:rPr lang="en-US" sz="2000" dirty="0">
+                <a:latin typeface="Arial" panose="020B0604020202020204" pitchFamily="34" charset="0"/>
+                <a:cs typeface="Arial" panose="020B0604020202020204" pitchFamily="34" charset="0"/>
+              </a:rPr>
+              <a:t> </a:t>
+            </a:r>
+            <a:r>
+              <a:rPr lang="en-US" sz="2000" dirty="0" err="1">
+                <a:latin typeface="Arial" panose="020B0604020202020204" pitchFamily="34" charset="0"/>
+                <a:cs typeface="Arial" panose="020B0604020202020204" pitchFamily="34" charset="0"/>
+              </a:rPr>
+              <a:t>về</a:t>
+            </a:r>
+            <a:r>
+              <a:rPr lang="en-US" sz="2000" dirty="0">
+                <a:latin typeface="Arial" panose="020B0604020202020204" pitchFamily="34" charset="0"/>
+                <a:cs typeface="Arial" panose="020B0604020202020204" pitchFamily="34" charset="0"/>
+              </a:rPr>
+              <a:t> </a:t>
+            </a:r>
+            <a:r>
+              <a:rPr lang="en-US" sz="2000" dirty="0" err="1">
+                <a:latin typeface="Arial" panose="020B0604020202020204" pitchFamily="34" charset="0"/>
+                <a:cs typeface="Arial" panose="020B0604020202020204" pitchFamily="34" charset="0"/>
+              </a:rPr>
+              <a:t>đa</a:t>
+            </a:r>
+            <a:r>
+              <a:rPr lang="en-US" sz="2000" dirty="0">
+                <a:latin typeface="Arial" panose="020B0604020202020204" pitchFamily="34" charset="0"/>
+                <a:cs typeface="Arial" panose="020B0604020202020204" pitchFamily="34" charset="0"/>
+              </a:rPr>
+              <a:t> </a:t>
+            </a:r>
+            <a:r>
+              <a:rPr lang="en-US" sz="2000" dirty="0" err="1">
+                <a:latin typeface="Arial" panose="020B0604020202020204" pitchFamily="34" charset="0"/>
+                <a:cs typeface="Arial" panose="020B0604020202020204" pitchFamily="34" charset="0"/>
+              </a:rPr>
+              <a:t>số</a:t>
+            </a:r>
+            <a:r>
+              <a:rPr lang="en-US" sz="2000" dirty="0">
+                <a:latin typeface="Arial" panose="020B0604020202020204" pitchFamily="34" charset="0"/>
+                <a:cs typeface="Arial" panose="020B0604020202020204" pitchFamily="34" charset="0"/>
+              </a:rPr>
+              <a:t> </a:t>
+            </a:r>
+            <a:r>
+              <a:rPr lang="en-US" sz="2000" dirty="0" err="1">
+                <a:latin typeface="Arial" panose="020B0604020202020204" pitchFamily="34" charset="0"/>
+                <a:cs typeface="Arial" panose="020B0604020202020204" pitchFamily="34" charset="0"/>
+              </a:rPr>
+              <a:t>các</a:t>
+            </a:r>
+            <a:r>
+              <a:rPr lang="en-US" sz="2000" dirty="0">
+                <a:latin typeface="Arial" panose="020B0604020202020204" pitchFamily="34" charset="0"/>
+                <a:cs typeface="Arial" panose="020B0604020202020204" pitchFamily="34" charset="0"/>
+              </a:rPr>
+              <a:t> </a:t>
+            </a:r>
+            <a:r>
+              <a:rPr lang="en-US" sz="2000" dirty="0" err="1">
+                <a:latin typeface="Arial" panose="020B0604020202020204" pitchFamily="34" charset="0"/>
+                <a:cs typeface="Arial" panose="020B0604020202020204" pitchFamily="34" charset="0"/>
+              </a:rPr>
+              <a:t>hàng</a:t>
+            </a:r>
+            <a:r>
+              <a:rPr lang="en-US" sz="2000" dirty="0">
+                <a:latin typeface="Arial" panose="020B0604020202020204" pitchFamily="34" charset="0"/>
+                <a:cs typeface="Arial" panose="020B0604020202020204" pitchFamily="34" charset="0"/>
+              </a:rPr>
+              <a:t> </a:t>
+            </a:r>
+            <a:r>
+              <a:rPr lang="en-US" sz="2000" dirty="0" err="1">
+                <a:latin typeface="Arial" panose="020B0604020202020204" pitchFamily="34" charset="0"/>
+                <a:cs typeface="Arial" panose="020B0604020202020204" pitchFamily="34" charset="0"/>
+              </a:rPr>
+              <a:t>hóa</a:t>
+            </a:r>
+            <a:r>
+              <a:rPr lang="en-US" sz="2000" dirty="0">
+                <a:latin typeface="Arial" panose="020B0604020202020204" pitchFamily="34" charset="0"/>
+                <a:cs typeface="Arial" panose="020B0604020202020204" pitchFamily="34" charset="0"/>
+              </a:rPr>
+              <a:t>.</a:t>
+            </a:r>
+          </a:p>
+          <a:p>
+            <a:pPr algn="just">
+              <a:lnSpc>
+                <a:spcPct val="150000"/>
+              </a:lnSpc>
+            </a:pPr>
+            <a:endParaRPr lang="en-US" sz="2000" dirty="0">
+              <a:latin typeface="Arial" panose="020B0604020202020204" pitchFamily="34" charset="0"/>
+              <a:cs typeface="Arial" panose="020B0604020202020204" pitchFamily="34" charset="0"/>
+            </a:endParaRPr>
+          </a:p>
+        </p:txBody>
+      </p:sp>
+      <p:sp>
+        <p:nvSpPr>
+          <p:cNvPr id="6" name="TextBox 5">
+            <a:extLst>
+              <a:ext uri="{FF2B5EF4-FFF2-40B4-BE49-F238E27FC236}">
+                <a16:creationId xmlns:a16="http://schemas.microsoft.com/office/drawing/2014/main" id="{9F8E8B9A-3579-4226-48B2-CF7258453F10}"/>
+              </a:ext>
+            </a:extLst>
+          </p:cNvPr>
+          <p:cNvSpPr txBox="1"/>
+          <p:nvPr/>
+        </p:nvSpPr>
+        <p:spPr>
+          <a:xfrm>
+            <a:off x="4505325" y="1834556"/>
+            <a:ext cx="3181350" cy="4473991"/>
+          </a:xfrm>
+          <a:prstGeom prst="roundRect">
+            <a:avLst/>
+          </a:prstGeom>
+          <a:ln>
+            <a:solidFill>
+              <a:schemeClr val="tx2">
+                <a:lumMod val="75000"/>
+                <a:lumOff val="25000"/>
+              </a:schemeClr>
+            </a:solidFill>
+          </a:ln>
+        </p:spPr>
+        <p:style>
+          <a:lnRef idx="2">
+            <a:schemeClr val="accent4"/>
+          </a:lnRef>
+          <a:fillRef idx="1">
+            <a:schemeClr val="lt1"/>
+          </a:fillRef>
+          <a:effectRef idx="0">
+            <a:schemeClr val="accent4"/>
+          </a:effectRef>
+          <a:fontRef idx="minor">
+            <a:schemeClr val="dk1"/>
+          </a:fontRef>
+        </p:style>
+        <p:txBody>
+          <a:bodyPr wrap="square" rtlCol="0">
+            <a:spAutoFit/>
+          </a:bodyPr>
+          <a:lstStyle/>
+          <a:p>
+            <a:pPr algn="just">
+              <a:lnSpc>
+                <a:spcPct val="150000"/>
+              </a:lnSpc>
+            </a:pPr>
+            <a:r>
+              <a:rPr lang="en-US" sz="2000" dirty="0">
+                <a:latin typeface="Arial" panose="020B0604020202020204" pitchFamily="34" charset="0"/>
+                <a:cs typeface="Arial" panose="020B0604020202020204" pitchFamily="34" charset="0"/>
+              </a:rPr>
+              <a:t>Các </a:t>
+            </a:r>
+            <a:r>
+              <a:rPr lang="en-US" sz="2000" dirty="0" err="1">
+                <a:latin typeface="Arial" panose="020B0604020202020204" pitchFamily="34" charset="0"/>
+                <a:cs typeface="Arial" panose="020B0604020202020204" pitchFamily="34" charset="0"/>
+              </a:rPr>
+              <a:t>cửa</a:t>
+            </a:r>
+            <a:r>
+              <a:rPr lang="en-US" sz="2000" dirty="0">
+                <a:latin typeface="Arial" panose="020B0604020202020204" pitchFamily="34" charset="0"/>
+                <a:cs typeface="Arial" panose="020B0604020202020204" pitchFamily="34" charset="0"/>
+              </a:rPr>
+              <a:t> </a:t>
+            </a:r>
+            <a:r>
+              <a:rPr lang="en-US" sz="2000" dirty="0" err="1">
+                <a:latin typeface="Arial" panose="020B0604020202020204" pitchFamily="34" charset="0"/>
+                <a:cs typeface="Arial" panose="020B0604020202020204" pitchFamily="34" charset="0"/>
+              </a:rPr>
+              <a:t>hàng</a:t>
+            </a:r>
+            <a:r>
+              <a:rPr lang="en-US" sz="2000" dirty="0">
+                <a:latin typeface="Arial" panose="020B0604020202020204" pitchFamily="34" charset="0"/>
+                <a:cs typeface="Arial" panose="020B0604020202020204" pitchFamily="34" charset="0"/>
+              </a:rPr>
+              <a:t>, </a:t>
+            </a:r>
+            <a:r>
+              <a:rPr lang="en-US" sz="2000" dirty="0" err="1">
+                <a:latin typeface="Arial" panose="020B0604020202020204" pitchFamily="34" charset="0"/>
+                <a:cs typeface="Arial" panose="020B0604020202020204" pitchFamily="34" charset="0"/>
+              </a:rPr>
+              <a:t>doanh</a:t>
+            </a:r>
+            <a:r>
+              <a:rPr lang="en-US" sz="2000" dirty="0">
+                <a:latin typeface="Arial" panose="020B0604020202020204" pitchFamily="34" charset="0"/>
+                <a:cs typeface="Arial" panose="020B0604020202020204" pitchFamily="34" charset="0"/>
+              </a:rPr>
+              <a:t> </a:t>
+            </a:r>
+            <a:r>
+              <a:rPr lang="en-US" sz="2000" dirty="0" err="1">
+                <a:latin typeface="Arial" panose="020B0604020202020204" pitchFamily="34" charset="0"/>
+                <a:cs typeface="Arial" panose="020B0604020202020204" pitchFamily="34" charset="0"/>
+              </a:rPr>
+              <a:t>nghiệp</a:t>
+            </a:r>
+            <a:r>
+              <a:rPr lang="en-US" sz="2000" dirty="0">
+                <a:latin typeface="Arial" panose="020B0604020202020204" pitchFamily="34" charset="0"/>
+                <a:cs typeface="Arial" panose="020B0604020202020204" pitchFamily="34" charset="0"/>
+              </a:rPr>
+              <a:t> </a:t>
+            </a:r>
+            <a:r>
+              <a:rPr lang="en-US" sz="2000" dirty="0" err="1">
+                <a:latin typeface="Arial" panose="020B0604020202020204" pitchFamily="34" charset="0"/>
+                <a:cs typeface="Arial" panose="020B0604020202020204" pitchFamily="34" charset="0"/>
+              </a:rPr>
+              <a:t>có</a:t>
+            </a:r>
+            <a:r>
+              <a:rPr lang="en-US" sz="2000" dirty="0">
+                <a:latin typeface="Arial" panose="020B0604020202020204" pitchFamily="34" charset="0"/>
+                <a:cs typeface="Arial" panose="020B0604020202020204" pitchFamily="34" charset="0"/>
+              </a:rPr>
+              <a:t> </a:t>
+            </a:r>
+            <a:r>
+              <a:rPr lang="en-US" sz="2000" dirty="0" err="1">
+                <a:latin typeface="Arial" panose="020B0604020202020204" pitchFamily="34" charset="0"/>
+                <a:cs typeface="Arial" panose="020B0604020202020204" pitchFamily="34" charset="0"/>
+              </a:rPr>
+              <a:t>lượng</a:t>
+            </a:r>
+            <a:r>
+              <a:rPr lang="en-US" sz="2000" dirty="0">
+                <a:latin typeface="Arial" panose="020B0604020202020204" pitchFamily="34" charset="0"/>
+                <a:cs typeface="Arial" panose="020B0604020202020204" pitchFamily="34" charset="0"/>
+              </a:rPr>
+              <a:t> </a:t>
+            </a:r>
+            <a:r>
+              <a:rPr lang="en-US" sz="2000" dirty="0" err="1">
+                <a:latin typeface="Arial" panose="020B0604020202020204" pitchFamily="34" charset="0"/>
+                <a:cs typeface="Arial" panose="020B0604020202020204" pitchFamily="34" charset="0"/>
+              </a:rPr>
+              <a:t>lớn</a:t>
+            </a:r>
+            <a:r>
+              <a:rPr lang="en-US" sz="2000" dirty="0">
+                <a:latin typeface="Arial" panose="020B0604020202020204" pitchFamily="34" charset="0"/>
+                <a:cs typeface="Arial" panose="020B0604020202020204" pitchFamily="34" charset="0"/>
+              </a:rPr>
+              <a:t> </a:t>
+            </a:r>
+            <a:r>
+              <a:rPr lang="en-US" sz="2000" dirty="0" err="1">
+                <a:latin typeface="Arial" panose="020B0604020202020204" pitchFamily="34" charset="0"/>
+                <a:cs typeface="Arial" panose="020B0604020202020204" pitchFamily="34" charset="0"/>
+              </a:rPr>
+              <a:t>khách</a:t>
+            </a:r>
+            <a:r>
+              <a:rPr lang="en-US" sz="2000" dirty="0">
+                <a:latin typeface="Arial" panose="020B0604020202020204" pitchFamily="34" charset="0"/>
+                <a:cs typeface="Arial" panose="020B0604020202020204" pitchFamily="34" charset="0"/>
+              </a:rPr>
+              <a:t> </a:t>
+            </a:r>
+            <a:r>
+              <a:rPr lang="en-US" sz="2000" dirty="0" err="1">
+                <a:latin typeface="Arial" panose="020B0604020202020204" pitchFamily="34" charset="0"/>
+                <a:cs typeface="Arial" panose="020B0604020202020204" pitchFamily="34" charset="0"/>
+              </a:rPr>
+              <a:t>hàng</a:t>
+            </a:r>
+            <a:r>
+              <a:rPr lang="en-US" sz="2000" dirty="0">
+                <a:latin typeface="Arial" panose="020B0604020202020204" pitchFamily="34" charset="0"/>
+                <a:cs typeface="Arial" panose="020B0604020202020204" pitchFamily="34" charset="0"/>
+              </a:rPr>
+              <a:t> </a:t>
+            </a:r>
+            <a:r>
+              <a:rPr lang="en-US" sz="2000" dirty="0" err="1">
+                <a:latin typeface="Arial" panose="020B0604020202020204" pitchFamily="34" charset="0"/>
+                <a:cs typeface="Arial" panose="020B0604020202020204" pitchFamily="34" charset="0"/>
+              </a:rPr>
+              <a:t>và</a:t>
+            </a:r>
+            <a:r>
+              <a:rPr lang="en-US" sz="2000" dirty="0">
+                <a:latin typeface="Arial" panose="020B0604020202020204" pitchFamily="34" charset="0"/>
+                <a:cs typeface="Arial" panose="020B0604020202020204" pitchFamily="34" charset="0"/>
+              </a:rPr>
+              <a:t> </a:t>
+            </a:r>
+            <a:r>
+              <a:rPr lang="en-US" sz="2000" dirty="0" err="1">
+                <a:latin typeface="Arial" panose="020B0604020202020204" pitchFamily="34" charset="0"/>
+                <a:cs typeface="Arial" panose="020B0604020202020204" pitchFamily="34" charset="0"/>
+              </a:rPr>
+              <a:t>doanh</a:t>
+            </a:r>
+            <a:r>
+              <a:rPr lang="en-US" sz="2000" dirty="0">
+                <a:latin typeface="Arial" panose="020B0604020202020204" pitchFamily="34" charset="0"/>
+                <a:cs typeface="Arial" panose="020B0604020202020204" pitchFamily="34" charset="0"/>
+              </a:rPr>
+              <a:t> </a:t>
+            </a:r>
+            <a:r>
+              <a:rPr lang="en-US" sz="2000" dirty="0" err="1">
+                <a:latin typeface="Arial" panose="020B0604020202020204" pitchFamily="34" charset="0"/>
+                <a:cs typeface="Arial" panose="020B0604020202020204" pitchFamily="34" charset="0"/>
+              </a:rPr>
+              <a:t>số</a:t>
+            </a:r>
+            <a:r>
+              <a:rPr lang="en-US" sz="2000" dirty="0">
+                <a:latin typeface="Arial" panose="020B0604020202020204" pitchFamily="34" charset="0"/>
+                <a:cs typeface="Arial" panose="020B0604020202020204" pitchFamily="34" charset="0"/>
+              </a:rPr>
+              <a:t> </a:t>
+            </a:r>
+            <a:r>
+              <a:rPr lang="en-US" sz="2000" dirty="0" err="1">
+                <a:latin typeface="Arial" panose="020B0604020202020204" pitchFamily="34" charset="0"/>
+                <a:cs typeface="Arial" panose="020B0604020202020204" pitchFamily="34" charset="0"/>
+              </a:rPr>
+              <a:t>sản</a:t>
+            </a:r>
+            <a:r>
+              <a:rPr lang="en-US" sz="2000" dirty="0">
+                <a:latin typeface="Arial" panose="020B0604020202020204" pitchFamily="34" charset="0"/>
+                <a:cs typeface="Arial" panose="020B0604020202020204" pitchFamily="34" charset="0"/>
+              </a:rPr>
+              <a:t> </a:t>
+            </a:r>
+            <a:r>
+              <a:rPr lang="en-US" sz="2000" dirty="0" err="1">
+                <a:latin typeface="Arial" panose="020B0604020202020204" pitchFamily="34" charset="0"/>
+                <a:cs typeface="Arial" panose="020B0604020202020204" pitchFamily="34" charset="0"/>
+              </a:rPr>
+              <a:t>phẩm</a:t>
+            </a:r>
+            <a:r>
+              <a:rPr lang="en-US" sz="2000" dirty="0">
+                <a:latin typeface="Arial" panose="020B0604020202020204" pitchFamily="34" charset="0"/>
+                <a:cs typeface="Arial" panose="020B0604020202020204" pitchFamily="34" charset="0"/>
+              </a:rPr>
+              <a:t> </a:t>
+            </a:r>
+            <a:r>
+              <a:rPr lang="en-US" sz="2000" dirty="0" err="1">
+                <a:latin typeface="Arial" panose="020B0604020202020204" pitchFamily="34" charset="0"/>
+                <a:cs typeface="Arial" panose="020B0604020202020204" pitchFamily="34" charset="0"/>
+              </a:rPr>
+              <a:t>bán</a:t>
+            </a:r>
+            <a:r>
+              <a:rPr lang="en-US" sz="2000" dirty="0">
+                <a:latin typeface="Arial" panose="020B0604020202020204" pitchFamily="34" charset="0"/>
+                <a:cs typeface="Arial" panose="020B0604020202020204" pitchFamily="34" charset="0"/>
+              </a:rPr>
+              <a:t> </a:t>
+            </a:r>
+            <a:r>
+              <a:rPr lang="en-US" sz="2000" dirty="0" err="1">
+                <a:latin typeface="Arial" panose="020B0604020202020204" pitchFamily="34" charset="0"/>
+                <a:cs typeface="Arial" panose="020B0604020202020204" pitchFamily="34" charset="0"/>
+              </a:rPr>
+              <a:t>ra</a:t>
+            </a:r>
+            <a:r>
+              <a:rPr lang="en-US" sz="2000" dirty="0">
+                <a:latin typeface="Arial" panose="020B0604020202020204" pitchFamily="34" charset="0"/>
+                <a:cs typeface="Arial" panose="020B0604020202020204" pitchFamily="34" charset="0"/>
+              </a:rPr>
+              <a:t> </a:t>
+            </a:r>
+            <a:r>
+              <a:rPr lang="en-US" sz="2000" dirty="0" err="1">
+                <a:latin typeface="Arial" panose="020B0604020202020204" pitchFamily="34" charset="0"/>
+                <a:cs typeface="Arial" panose="020B0604020202020204" pitchFamily="34" charset="0"/>
+              </a:rPr>
+              <a:t>trên</a:t>
+            </a:r>
+            <a:r>
+              <a:rPr lang="en-US" sz="2000" dirty="0">
+                <a:latin typeface="Arial" panose="020B0604020202020204" pitchFamily="34" charset="0"/>
+                <a:cs typeface="Arial" panose="020B0604020202020204" pitchFamily="34" charset="0"/>
+              </a:rPr>
+              <a:t> </a:t>
+            </a:r>
+            <a:r>
+              <a:rPr lang="en-US" sz="2000" dirty="0" err="1">
+                <a:latin typeface="Arial" panose="020B0604020202020204" pitchFamily="34" charset="0"/>
+                <a:cs typeface="Arial" panose="020B0604020202020204" pitchFamily="34" charset="0"/>
+              </a:rPr>
+              <a:t>các</a:t>
+            </a:r>
+            <a:r>
+              <a:rPr lang="en-US" sz="2000" dirty="0">
+                <a:latin typeface="Arial" panose="020B0604020202020204" pitchFamily="34" charset="0"/>
+                <a:cs typeface="Arial" panose="020B0604020202020204" pitchFamily="34" charset="0"/>
+              </a:rPr>
+              <a:t> </a:t>
+            </a:r>
+            <a:r>
+              <a:rPr lang="en-US" sz="2000" dirty="0" err="1">
+                <a:latin typeface="Arial" panose="020B0604020202020204" pitchFamily="34" charset="0"/>
+                <a:cs typeface="Arial" panose="020B0604020202020204" pitchFamily="34" charset="0"/>
+              </a:rPr>
+              <a:t>nền</a:t>
+            </a:r>
+            <a:r>
+              <a:rPr lang="en-US" sz="2000" dirty="0">
+                <a:latin typeface="Arial" panose="020B0604020202020204" pitchFamily="34" charset="0"/>
+                <a:cs typeface="Arial" panose="020B0604020202020204" pitchFamily="34" charset="0"/>
+              </a:rPr>
+              <a:t> </a:t>
+            </a:r>
+            <a:r>
+              <a:rPr lang="en-US" sz="2000" dirty="0" err="1">
+                <a:latin typeface="Arial" panose="020B0604020202020204" pitchFamily="34" charset="0"/>
+                <a:cs typeface="Arial" panose="020B0604020202020204" pitchFamily="34" charset="0"/>
+              </a:rPr>
+              <a:t>tảng</a:t>
+            </a:r>
+            <a:r>
+              <a:rPr lang="en-US" sz="2000" dirty="0">
+                <a:latin typeface="Arial" panose="020B0604020202020204" pitchFamily="34" charset="0"/>
+                <a:cs typeface="Arial" panose="020B0604020202020204" pitchFamily="34" charset="0"/>
+              </a:rPr>
+              <a:t> </a:t>
+            </a:r>
+            <a:r>
+              <a:rPr lang="en-US" sz="2000" dirty="0" err="1">
+                <a:latin typeface="Arial" panose="020B0604020202020204" pitchFamily="34" charset="0"/>
+                <a:cs typeface="Arial" panose="020B0604020202020204" pitchFamily="34" charset="0"/>
+              </a:rPr>
+              <a:t>này</a:t>
+            </a:r>
+            <a:r>
+              <a:rPr lang="en-US" sz="2000" dirty="0">
+                <a:latin typeface="Arial" panose="020B0604020202020204" pitchFamily="34" charset="0"/>
+                <a:cs typeface="Arial" panose="020B0604020202020204" pitchFamily="34" charset="0"/>
+              </a:rPr>
+              <a:t>. </a:t>
+            </a:r>
+            <a:r>
+              <a:rPr lang="en-US" sz="2000" dirty="0" err="1">
+                <a:latin typeface="Arial" panose="020B0604020202020204" pitchFamily="34" charset="0"/>
+                <a:cs typeface="Arial" panose="020B0604020202020204" pitchFamily="34" charset="0"/>
+              </a:rPr>
+              <a:t>Việc</a:t>
+            </a:r>
+            <a:r>
+              <a:rPr lang="en-US" sz="2000" dirty="0">
+                <a:latin typeface="Arial" panose="020B0604020202020204" pitchFamily="34" charset="0"/>
+                <a:cs typeface="Arial" panose="020B0604020202020204" pitchFamily="34" charset="0"/>
+              </a:rPr>
+              <a:t> </a:t>
+            </a:r>
+            <a:r>
+              <a:rPr lang="en-US" sz="2000" dirty="0" err="1">
+                <a:latin typeface="Arial" panose="020B0604020202020204" pitchFamily="34" charset="0"/>
+                <a:cs typeface="Arial" panose="020B0604020202020204" pitchFamily="34" charset="0"/>
+              </a:rPr>
+              <a:t>quản</a:t>
+            </a:r>
+            <a:r>
+              <a:rPr lang="en-US" sz="2000" dirty="0">
+                <a:latin typeface="Arial" panose="020B0604020202020204" pitchFamily="34" charset="0"/>
+                <a:cs typeface="Arial" panose="020B0604020202020204" pitchFamily="34" charset="0"/>
+              </a:rPr>
+              <a:t> </a:t>
+            </a:r>
+            <a:r>
+              <a:rPr lang="en-US" sz="2000" dirty="0" err="1">
+                <a:latin typeface="Arial" panose="020B0604020202020204" pitchFamily="34" charset="0"/>
+                <a:cs typeface="Arial" panose="020B0604020202020204" pitchFamily="34" charset="0"/>
+              </a:rPr>
+              <a:t>lý</a:t>
+            </a:r>
+            <a:r>
+              <a:rPr lang="en-US" sz="2000" dirty="0">
+                <a:latin typeface="Arial" panose="020B0604020202020204" pitchFamily="34" charset="0"/>
+                <a:cs typeface="Arial" panose="020B0604020202020204" pitchFamily="34" charset="0"/>
+              </a:rPr>
+              <a:t>, </a:t>
+            </a:r>
+            <a:r>
+              <a:rPr lang="en-US" sz="2000" dirty="0" err="1">
+                <a:latin typeface="Arial" panose="020B0604020202020204" pitchFamily="34" charset="0"/>
+                <a:cs typeface="Arial" panose="020B0604020202020204" pitchFamily="34" charset="0"/>
+              </a:rPr>
+              <a:t>chăm</a:t>
+            </a:r>
+            <a:r>
+              <a:rPr lang="en-US" sz="2000" dirty="0">
+                <a:latin typeface="Arial" panose="020B0604020202020204" pitchFamily="34" charset="0"/>
+                <a:cs typeface="Arial" panose="020B0604020202020204" pitchFamily="34" charset="0"/>
+              </a:rPr>
+              <a:t> </a:t>
+            </a:r>
+            <a:r>
+              <a:rPr lang="en-US" sz="2000" dirty="0" err="1">
+                <a:latin typeface="Arial" panose="020B0604020202020204" pitchFamily="34" charset="0"/>
+                <a:cs typeface="Arial" panose="020B0604020202020204" pitchFamily="34" charset="0"/>
+              </a:rPr>
+              <a:t>sóc</a:t>
+            </a:r>
+            <a:r>
+              <a:rPr lang="en-US" sz="2000" dirty="0">
+                <a:latin typeface="Arial" panose="020B0604020202020204" pitchFamily="34" charset="0"/>
+                <a:cs typeface="Arial" panose="020B0604020202020204" pitchFamily="34" charset="0"/>
+              </a:rPr>
+              <a:t> </a:t>
+            </a:r>
+            <a:r>
+              <a:rPr lang="en-US" sz="2000" dirty="0" err="1">
+                <a:latin typeface="Arial" panose="020B0604020202020204" pitchFamily="34" charset="0"/>
+                <a:cs typeface="Arial" panose="020B0604020202020204" pitchFamily="34" charset="0"/>
+              </a:rPr>
+              <a:t>lấy</a:t>
+            </a:r>
+            <a:r>
+              <a:rPr lang="en-US" sz="2000" dirty="0">
+                <a:latin typeface="Arial" panose="020B0604020202020204" pitchFamily="34" charset="0"/>
+                <a:cs typeface="Arial" panose="020B0604020202020204" pitchFamily="34" charset="0"/>
+              </a:rPr>
+              <a:t> ý </a:t>
+            </a:r>
+            <a:r>
+              <a:rPr lang="en-US" sz="2000" dirty="0" err="1">
+                <a:latin typeface="Arial" panose="020B0604020202020204" pitchFamily="34" charset="0"/>
+                <a:cs typeface="Arial" panose="020B0604020202020204" pitchFamily="34" charset="0"/>
+              </a:rPr>
+              <a:t>kiến</a:t>
+            </a:r>
+            <a:r>
+              <a:rPr lang="en-US" sz="2000" dirty="0">
+                <a:latin typeface="Arial" panose="020B0604020202020204" pitchFamily="34" charset="0"/>
+                <a:cs typeface="Arial" panose="020B0604020202020204" pitchFamily="34" charset="0"/>
+              </a:rPr>
+              <a:t> </a:t>
+            </a:r>
+            <a:r>
+              <a:rPr lang="en-US" sz="2000" dirty="0" err="1">
+                <a:latin typeface="Arial" panose="020B0604020202020204" pitchFamily="34" charset="0"/>
+                <a:cs typeface="Arial" panose="020B0604020202020204" pitchFamily="34" charset="0"/>
+              </a:rPr>
+              <a:t>từ</a:t>
+            </a:r>
+            <a:r>
+              <a:rPr lang="en-US" sz="2000" dirty="0">
+                <a:latin typeface="Arial" panose="020B0604020202020204" pitchFamily="34" charset="0"/>
+                <a:cs typeface="Arial" panose="020B0604020202020204" pitchFamily="34" charset="0"/>
+              </a:rPr>
+              <a:t> </a:t>
+            </a:r>
+            <a:r>
+              <a:rPr lang="en-US" sz="2000" dirty="0" err="1">
+                <a:latin typeface="Arial" panose="020B0604020202020204" pitchFamily="34" charset="0"/>
+                <a:cs typeface="Arial" panose="020B0604020202020204" pitchFamily="34" charset="0"/>
+              </a:rPr>
+              <a:t>khách</a:t>
+            </a:r>
+            <a:r>
+              <a:rPr lang="en-US" sz="2000" dirty="0">
+                <a:latin typeface="Arial" panose="020B0604020202020204" pitchFamily="34" charset="0"/>
+                <a:cs typeface="Arial" panose="020B0604020202020204" pitchFamily="34" charset="0"/>
+              </a:rPr>
+              <a:t> </a:t>
+            </a:r>
+            <a:r>
+              <a:rPr lang="en-US" sz="2000" dirty="0" err="1">
+                <a:latin typeface="Arial" panose="020B0604020202020204" pitchFamily="34" charset="0"/>
+                <a:cs typeface="Arial" panose="020B0604020202020204" pitchFamily="34" charset="0"/>
+              </a:rPr>
+              <a:t>hàng</a:t>
+            </a:r>
+            <a:r>
+              <a:rPr lang="en-US" sz="2000" dirty="0">
+                <a:latin typeface="Arial" panose="020B0604020202020204" pitchFamily="34" charset="0"/>
+                <a:cs typeface="Arial" panose="020B0604020202020204" pitchFamily="34" charset="0"/>
+              </a:rPr>
+              <a:t> </a:t>
+            </a:r>
+            <a:r>
+              <a:rPr lang="en-US" sz="2000" dirty="0" err="1">
+                <a:latin typeface="Arial" panose="020B0604020202020204" pitchFamily="34" charset="0"/>
+                <a:cs typeface="Arial" panose="020B0604020202020204" pitchFamily="34" charset="0"/>
+              </a:rPr>
+              <a:t>là</a:t>
+            </a:r>
+            <a:r>
+              <a:rPr lang="en-US" sz="2000" dirty="0">
+                <a:latin typeface="Arial" panose="020B0604020202020204" pitchFamily="34" charset="0"/>
+                <a:cs typeface="Arial" panose="020B0604020202020204" pitchFamily="34" charset="0"/>
+              </a:rPr>
+              <a:t> </a:t>
+            </a:r>
+            <a:r>
+              <a:rPr lang="en-US" sz="2000" dirty="0" err="1">
+                <a:latin typeface="Arial" panose="020B0604020202020204" pitchFamily="34" charset="0"/>
+                <a:cs typeface="Arial" panose="020B0604020202020204" pitchFamily="34" charset="0"/>
+              </a:rPr>
+              <a:t>rất</a:t>
+            </a:r>
+            <a:r>
+              <a:rPr lang="en-US" sz="2000" dirty="0">
+                <a:latin typeface="Arial" panose="020B0604020202020204" pitchFamily="34" charset="0"/>
+                <a:cs typeface="Arial" panose="020B0604020202020204" pitchFamily="34" charset="0"/>
+              </a:rPr>
+              <a:t> </a:t>
+            </a:r>
+            <a:r>
+              <a:rPr lang="en-US" sz="2000" dirty="0" err="1">
+                <a:latin typeface="Arial" panose="020B0604020202020204" pitchFamily="34" charset="0"/>
+                <a:cs typeface="Arial" panose="020B0604020202020204" pitchFamily="34" charset="0"/>
+              </a:rPr>
+              <a:t>quan</a:t>
+            </a:r>
+            <a:r>
+              <a:rPr lang="en-US" sz="2000" dirty="0">
+                <a:latin typeface="Arial" panose="020B0604020202020204" pitchFamily="34" charset="0"/>
+                <a:cs typeface="Arial" panose="020B0604020202020204" pitchFamily="34" charset="0"/>
+              </a:rPr>
+              <a:t> </a:t>
+            </a:r>
+            <a:r>
+              <a:rPr lang="en-US" sz="2000" dirty="0" err="1">
+                <a:latin typeface="Arial" panose="020B0604020202020204" pitchFamily="34" charset="0"/>
+                <a:cs typeface="Arial" panose="020B0604020202020204" pitchFamily="34" charset="0"/>
+              </a:rPr>
+              <a:t>trọng</a:t>
+            </a:r>
+            <a:r>
+              <a:rPr lang="en-US" sz="2000" dirty="0">
+                <a:latin typeface="Arial" panose="020B0604020202020204" pitchFamily="34" charset="0"/>
+                <a:cs typeface="Arial" panose="020B0604020202020204" pitchFamily="34" charset="0"/>
+              </a:rPr>
+              <a:t>.</a:t>
+            </a:r>
+          </a:p>
+          <a:p>
+            <a:pPr algn="just">
+              <a:lnSpc>
+                <a:spcPct val="150000"/>
+              </a:lnSpc>
+            </a:pPr>
+            <a:endParaRPr lang="en-US" sz="2000" dirty="0">
+              <a:latin typeface="Arial" panose="020B0604020202020204" pitchFamily="34" charset="0"/>
+              <a:cs typeface="Arial" panose="020B0604020202020204" pitchFamily="34" charset="0"/>
+            </a:endParaRPr>
+          </a:p>
+        </p:txBody>
+      </p:sp>
+      <p:sp>
+        <p:nvSpPr>
+          <p:cNvPr id="7" name="TextBox 6">
+            <a:extLst>
+              <a:ext uri="{FF2B5EF4-FFF2-40B4-BE49-F238E27FC236}">
+                <a16:creationId xmlns:a16="http://schemas.microsoft.com/office/drawing/2014/main" id="{F6A8CE52-98B4-F58C-6BEA-A2CA794EFFD2}"/>
+              </a:ext>
+            </a:extLst>
+          </p:cNvPr>
+          <p:cNvSpPr txBox="1"/>
+          <p:nvPr/>
+        </p:nvSpPr>
+        <p:spPr>
+          <a:xfrm>
+            <a:off x="8524875" y="1834555"/>
+            <a:ext cx="3181350" cy="4473991"/>
+          </a:xfrm>
+          <a:prstGeom prst="roundRect">
+            <a:avLst/>
+          </a:prstGeom>
+          <a:ln>
+            <a:solidFill>
+              <a:schemeClr val="tx2">
+                <a:lumMod val="75000"/>
+                <a:lumOff val="25000"/>
+              </a:schemeClr>
+            </a:solidFill>
+          </a:ln>
+        </p:spPr>
+        <p:style>
+          <a:lnRef idx="2">
+            <a:schemeClr val="accent4"/>
+          </a:lnRef>
+          <a:fillRef idx="1">
+            <a:schemeClr val="lt1"/>
+          </a:fillRef>
+          <a:effectRef idx="0">
+            <a:schemeClr val="accent4"/>
+          </a:effectRef>
+          <a:fontRef idx="minor">
+            <a:schemeClr val="dk1"/>
+          </a:fontRef>
+        </p:style>
+        <p:txBody>
+          <a:bodyPr wrap="square" rtlCol="0">
+            <a:spAutoFit/>
+          </a:bodyPr>
+          <a:lstStyle/>
+          <a:p>
+            <a:pPr algn="just">
+              <a:lnSpc>
+                <a:spcPct val="150000"/>
+              </a:lnSpc>
+            </a:pPr>
+            <a:r>
+              <a:rPr lang="en-US" sz="2000" dirty="0" err="1">
+                <a:latin typeface="Arial" panose="020B0604020202020204" pitchFamily="34" charset="0"/>
+                <a:cs typeface="Arial" panose="020B0604020202020204" pitchFamily="34" charset="0"/>
+              </a:rPr>
+              <a:t>Có</a:t>
+            </a:r>
+            <a:r>
+              <a:rPr lang="en-US" sz="2000" dirty="0">
+                <a:latin typeface="Arial" panose="020B0604020202020204" pitchFamily="34" charset="0"/>
+                <a:cs typeface="Arial" panose="020B0604020202020204" pitchFamily="34" charset="0"/>
+              </a:rPr>
+              <a:t> </a:t>
+            </a:r>
+            <a:r>
+              <a:rPr lang="en-US" sz="2000" dirty="0" err="1">
+                <a:latin typeface="Arial" panose="020B0604020202020204" pitchFamily="34" charset="0"/>
+                <a:cs typeface="Arial" panose="020B0604020202020204" pitchFamily="34" charset="0"/>
+              </a:rPr>
+              <a:t>rất</a:t>
+            </a:r>
+            <a:r>
+              <a:rPr lang="en-US" sz="2000" dirty="0">
+                <a:latin typeface="Arial" panose="020B0604020202020204" pitchFamily="34" charset="0"/>
+                <a:cs typeface="Arial" panose="020B0604020202020204" pitchFamily="34" charset="0"/>
+              </a:rPr>
+              <a:t> </a:t>
+            </a:r>
+            <a:r>
+              <a:rPr lang="en-US" sz="2000" dirty="0" err="1">
+                <a:latin typeface="Arial" panose="020B0604020202020204" pitchFamily="34" charset="0"/>
+                <a:cs typeface="Arial" panose="020B0604020202020204" pitchFamily="34" charset="0"/>
+              </a:rPr>
+              <a:t>nhiều</a:t>
+            </a:r>
+            <a:r>
+              <a:rPr lang="en-US" sz="2000" dirty="0">
+                <a:latin typeface="Arial" panose="020B0604020202020204" pitchFamily="34" charset="0"/>
+                <a:cs typeface="Arial" panose="020B0604020202020204" pitchFamily="34" charset="0"/>
+              </a:rPr>
+              <a:t> ý </a:t>
+            </a:r>
+            <a:r>
+              <a:rPr lang="en-US" sz="2000" dirty="0" err="1">
+                <a:latin typeface="Arial" panose="020B0604020202020204" pitchFamily="34" charset="0"/>
+                <a:cs typeface="Arial" panose="020B0604020202020204" pitchFamily="34" charset="0"/>
+              </a:rPr>
+              <a:t>kiến</a:t>
+            </a:r>
+            <a:r>
+              <a:rPr lang="en-US" sz="2000" dirty="0">
+                <a:latin typeface="Arial" panose="020B0604020202020204" pitchFamily="34" charset="0"/>
+                <a:cs typeface="Arial" panose="020B0604020202020204" pitchFamily="34" charset="0"/>
+              </a:rPr>
+              <a:t> </a:t>
+            </a:r>
+            <a:r>
+              <a:rPr lang="en-US" sz="2000" dirty="0" err="1">
+                <a:latin typeface="Arial" panose="020B0604020202020204" pitchFamily="34" charset="0"/>
+                <a:cs typeface="Arial" panose="020B0604020202020204" pitchFamily="34" charset="0"/>
+              </a:rPr>
+              <a:t>đánh</a:t>
+            </a:r>
+            <a:r>
+              <a:rPr lang="en-US" sz="2000" dirty="0">
+                <a:latin typeface="Arial" panose="020B0604020202020204" pitchFamily="34" charset="0"/>
+                <a:cs typeface="Arial" panose="020B0604020202020204" pitchFamily="34" charset="0"/>
+              </a:rPr>
+              <a:t> </a:t>
+            </a:r>
+            <a:r>
+              <a:rPr lang="en-US" sz="2000" dirty="0" err="1">
+                <a:latin typeface="Arial" panose="020B0604020202020204" pitchFamily="34" charset="0"/>
+                <a:cs typeface="Arial" panose="020B0604020202020204" pitchFamily="34" charset="0"/>
+              </a:rPr>
+              <a:t>giá</a:t>
+            </a:r>
+            <a:r>
+              <a:rPr lang="en-US" sz="2000" dirty="0">
+                <a:latin typeface="Arial" panose="020B0604020202020204" pitchFamily="34" charset="0"/>
+                <a:cs typeface="Arial" panose="020B0604020202020204" pitchFamily="34" charset="0"/>
+              </a:rPr>
+              <a:t> </a:t>
+            </a:r>
+            <a:r>
+              <a:rPr lang="en-US" sz="2000" dirty="0" err="1">
+                <a:latin typeface="Arial" panose="020B0604020202020204" pitchFamily="34" charset="0"/>
+                <a:cs typeface="Arial" panose="020B0604020202020204" pitchFamily="34" charset="0"/>
+              </a:rPr>
+              <a:t>các</a:t>
+            </a:r>
+            <a:r>
+              <a:rPr lang="en-US" sz="2000" dirty="0">
+                <a:latin typeface="Arial" panose="020B0604020202020204" pitchFamily="34" charset="0"/>
+                <a:cs typeface="Arial" panose="020B0604020202020204" pitchFamily="34" charset="0"/>
+              </a:rPr>
+              <a:t> </a:t>
+            </a:r>
+            <a:r>
+              <a:rPr lang="en-US" sz="2000" dirty="0" err="1">
+                <a:latin typeface="Arial" panose="020B0604020202020204" pitchFamily="34" charset="0"/>
+                <a:cs typeface="Arial" panose="020B0604020202020204" pitchFamily="34" charset="0"/>
+              </a:rPr>
+              <a:t>sản</a:t>
+            </a:r>
+            <a:r>
+              <a:rPr lang="en-US" sz="2000" dirty="0">
+                <a:latin typeface="Arial" panose="020B0604020202020204" pitchFamily="34" charset="0"/>
+                <a:cs typeface="Arial" panose="020B0604020202020204" pitchFamily="34" charset="0"/>
+              </a:rPr>
+              <a:t> </a:t>
+            </a:r>
+            <a:r>
+              <a:rPr lang="en-US" sz="2000" dirty="0" err="1">
+                <a:latin typeface="Arial" panose="020B0604020202020204" pitchFamily="34" charset="0"/>
+                <a:cs typeface="Arial" panose="020B0604020202020204" pitchFamily="34" charset="0"/>
+              </a:rPr>
+              <a:t>phẩm</a:t>
+            </a:r>
+            <a:r>
+              <a:rPr lang="en-US" sz="2000" dirty="0">
+                <a:latin typeface="Arial" panose="020B0604020202020204" pitchFamily="34" charset="0"/>
+                <a:cs typeface="Arial" panose="020B0604020202020204" pitchFamily="34" charset="0"/>
+              </a:rPr>
+              <a:t>, </a:t>
+            </a:r>
+            <a:r>
+              <a:rPr lang="en-US" sz="2000" dirty="0" err="1">
+                <a:latin typeface="Arial" panose="020B0604020202020204" pitchFamily="34" charset="0"/>
+                <a:cs typeface="Arial" panose="020B0604020202020204" pitchFamily="34" charset="0"/>
+              </a:rPr>
+              <a:t>vì</a:t>
+            </a:r>
+            <a:r>
+              <a:rPr lang="en-US" sz="2000" dirty="0">
+                <a:latin typeface="Arial" panose="020B0604020202020204" pitchFamily="34" charset="0"/>
+                <a:cs typeface="Arial" panose="020B0604020202020204" pitchFamily="34" charset="0"/>
+              </a:rPr>
+              <a:t> </a:t>
+            </a:r>
+            <a:r>
+              <a:rPr lang="en-US" sz="2000" dirty="0" err="1">
+                <a:latin typeface="Arial" panose="020B0604020202020204" pitchFamily="34" charset="0"/>
+                <a:cs typeface="Arial" panose="020B0604020202020204" pitchFamily="34" charset="0"/>
+              </a:rPr>
+              <a:t>vậy</a:t>
+            </a:r>
+            <a:r>
+              <a:rPr lang="en-US" sz="2000" dirty="0">
+                <a:latin typeface="Arial" panose="020B0604020202020204" pitchFamily="34" charset="0"/>
+                <a:cs typeface="Arial" panose="020B0604020202020204" pitchFamily="34" charset="0"/>
+              </a:rPr>
+              <a:t> </a:t>
+            </a:r>
+            <a:r>
+              <a:rPr lang="en-US" sz="2000" dirty="0" err="1">
+                <a:latin typeface="Arial" panose="020B0604020202020204" pitchFamily="34" charset="0"/>
+                <a:cs typeface="Arial" panose="020B0604020202020204" pitchFamily="34" charset="0"/>
+              </a:rPr>
+              <a:t>cần</a:t>
+            </a:r>
+            <a:r>
+              <a:rPr lang="en-US" sz="2000" dirty="0">
+                <a:latin typeface="Arial" panose="020B0604020202020204" pitchFamily="34" charset="0"/>
+                <a:cs typeface="Arial" panose="020B0604020202020204" pitchFamily="34" charset="0"/>
+              </a:rPr>
+              <a:t> </a:t>
+            </a:r>
+            <a:r>
+              <a:rPr lang="en-US" sz="2000" dirty="0" err="1">
+                <a:latin typeface="Arial" panose="020B0604020202020204" pitchFamily="34" charset="0"/>
+                <a:cs typeface="Arial" panose="020B0604020202020204" pitchFamily="34" charset="0"/>
+              </a:rPr>
+              <a:t>một</a:t>
+            </a:r>
+            <a:r>
+              <a:rPr lang="en-US" sz="2000" dirty="0">
+                <a:latin typeface="Arial" panose="020B0604020202020204" pitchFamily="34" charset="0"/>
+                <a:cs typeface="Arial" panose="020B0604020202020204" pitchFamily="34" charset="0"/>
+              </a:rPr>
+              <a:t> </a:t>
+            </a:r>
+            <a:r>
+              <a:rPr lang="en-US" sz="2000" dirty="0" err="1">
+                <a:latin typeface="Arial" panose="020B0604020202020204" pitchFamily="34" charset="0"/>
+                <a:cs typeface="Arial" panose="020B0604020202020204" pitchFamily="34" charset="0"/>
+              </a:rPr>
+              <a:t>giải</a:t>
+            </a:r>
+            <a:r>
+              <a:rPr lang="en-US" sz="2000" dirty="0">
+                <a:latin typeface="Arial" panose="020B0604020202020204" pitchFamily="34" charset="0"/>
+                <a:cs typeface="Arial" panose="020B0604020202020204" pitchFamily="34" charset="0"/>
+              </a:rPr>
+              <a:t> </a:t>
+            </a:r>
+            <a:r>
+              <a:rPr lang="en-US" sz="2000" dirty="0" err="1">
+                <a:latin typeface="Arial" panose="020B0604020202020204" pitchFamily="34" charset="0"/>
+                <a:cs typeface="Arial" panose="020B0604020202020204" pitchFamily="34" charset="0"/>
+              </a:rPr>
+              <a:t>pháp</a:t>
+            </a:r>
+            <a:r>
+              <a:rPr lang="en-US" sz="2000" dirty="0">
+                <a:latin typeface="Arial" panose="020B0604020202020204" pitchFamily="34" charset="0"/>
+                <a:cs typeface="Arial" panose="020B0604020202020204" pitchFamily="34" charset="0"/>
+              </a:rPr>
+              <a:t> </a:t>
+            </a:r>
+            <a:r>
+              <a:rPr lang="en-US" sz="2000" dirty="0" err="1">
+                <a:latin typeface="Arial" panose="020B0604020202020204" pitchFamily="34" charset="0"/>
+                <a:cs typeface="Arial" panose="020B0604020202020204" pitchFamily="34" charset="0"/>
+              </a:rPr>
+              <a:t>thực</a:t>
+            </a:r>
+            <a:r>
+              <a:rPr lang="en-US" sz="2000" dirty="0">
+                <a:latin typeface="Arial" panose="020B0604020202020204" pitchFamily="34" charset="0"/>
+                <a:cs typeface="Arial" panose="020B0604020202020204" pitchFamily="34" charset="0"/>
+              </a:rPr>
+              <a:t> </a:t>
+            </a:r>
+            <a:r>
+              <a:rPr lang="en-US" sz="2000" dirty="0" err="1">
+                <a:latin typeface="Arial" panose="020B0604020202020204" pitchFamily="34" charset="0"/>
+                <a:cs typeface="Arial" panose="020B0604020202020204" pitchFamily="34" charset="0"/>
+              </a:rPr>
+              <a:t>tiễn</a:t>
+            </a:r>
+            <a:r>
+              <a:rPr lang="en-US" sz="2000" dirty="0">
+                <a:latin typeface="Arial" panose="020B0604020202020204" pitchFamily="34" charset="0"/>
+                <a:cs typeface="Arial" panose="020B0604020202020204" pitchFamily="34" charset="0"/>
+              </a:rPr>
+              <a:t> </a:t>
+            </a:r>
+            <a:r>
+              <a:rPr lang="en-US" sz="2000" dirty="0" err="1">
+                <a:latin typeface="Arial" panose="020B0604020202020204" pitchFamily="34" charset="0"/>
+                <a:cs typeface="Arial" panose="020B0604020202020204" pitchFamily="34" charset="0"/>
+              </a:rPr>
+              <a:t>để</a:t>
+            </a:r>
+            <a:r>
+              <a:rPr lang="en-US" sz="2000" dirty="0">
+                <a:latin typeface="Arial" panose="020B0604020202020204" pitchFamily="34" charset="0"/>
+                <a:cs typeface="Arial" panose="020B0604020202020204" pitchFamily="34" charset="0"/>
+              </a:rPr>
+              <a:t> </a:t>
+            </a:r>
+            <a:r>
+              <a:rPr lang="en-US" sz="2000" dirty="0" err="1">
+                <a:latin typeface="Arial" panose="020B0604020202020204" pitchFamily="34" charset="0"/>
+                <a:cs typeface="Arial" panose="020B0604020202020204" pitchFamily="34" charset="0"/>
+              </a:rPr>
+              <a:t>các</a:t>
+            </a:r>
+            <a:r>
+              <a:rPr lang="en-US" sz="2000" dirty="0">
+                <a:latin typeface="Arial" panose="020B0604020202020204" pitchFamily="34" charset="0"/>
+                <a:cs typeface="Arial" panose="020B0604020202020204" pitchFamily="34" charset="0"/>
+              </a:rPr>
+              <a:t> </a:t>
+            </a:r>
+            <a:r>
+              <a:rPr lang="en-US" sz="2000" dirty="0" err="1">
+                <a:latin typeface="Arial" panose="020B0604020202020204" pitchFamily="34" charset="0"/>
+                <a:cs typeface="Arial" panose="020B0604020202020204" pitchFamily="34" charset="0"/>
+              </a:rPr>
+              <a:t>cửa</a:t>
+            </a:r>
+            <a:r>
+              <a:rPr lang="en-US" sz="2000" dirty="0">
+                <a:latin typeface="Arial" panose="020B0604020202020204" pitchFamily="34" charset="0"/>
+                <a:cs typeface="Arial" panose="020B0604020202020204" pitchFamily="34" charset="0"/>
+              </a:rPr>
+              <a:t> </a:t>
+            </a:r>
+            <a:r>
+              <a:rPr lang="en-US" sz="2000" dirty="0" err="1">
+                <a:latin typeface="Arial" panose="020B0604020202020204" pitchFamily="34" charset="0"/>
+                <a:cs typeface="Arial" panose="020B0604020202020204" pitchFamily="34" charset="0"/>
+              </a:rPr>
+              <a:t>hàng</a:t>
+            </a:r>
+            <a:r>
+              <a:rPr lang="en-US" sz="2000" dirty="0">
+                <a:latin typeface="Arial" panose="020B0604020202020204" pitchFamily="34" charset="0"/>
+                <a:cs typeface="Arial" panose="020B0604020202020204" pitchFamily="34" charset="0"/>
+              </a:rPr>
+              <a:t>, </a:t>
+            </a:r>
+            <a:r>
+              <a:rPr lang="en-US" sz="2000" dirty="0" err="1">
+                <a:latin typeface="Arial" panose="020B0604020202020204" pitchFamily="34" charset="0"/>
+                <a:cs typeface="Arial" panose="020B0604020202020204" pitchFamily="34" charset="0"/>
+              </a:rPr>
+              <a:t>doanh</a:t>
+            </a:r>
+            <a:r>
+              <a:rPr lang="en-US" sz="2000" dirty="0">
+                <a:latin typeface="Arial" panose="020B0604020202020204" pitchFamily="34" charset="0"/>
+                <a:cs typeface="Arial" panose="020B0604020202020204" pitchFamily="34" charset="0"/>
+              </a:rPr>
+              <a:t> </a:t>
+            </a:r>
+            <a:r>
+              <a:rPr lang="en-US" sz="2000" dirty="0" err="1">
+                <a:latin typeface="Arial" panose="020B0604020202020204" pitchFamily="34" charset="0"/>
+                <a:cs typeface="Arial" panose="020B0604020202020204" pitchFamily="34" charset="0"/>
+              </a:rPr>
+              <a:t>nghiệp</a:t>
+            </a:r>
+            <a:r>
+              <a:rPr lang="en-US" sz="2000" dirty="0">
+                <a:latin typeface="Arial" panose="020B0604020202020204" pitchFamily="34" charset="0"/>
+                <a:cs typeface="Arial" panose="020B0604020202020204" pitchFamily="34" charset="0"/>
+              </a:rPr>
+              <a:t> </a:t>
+            </a:r>
+            <a:r>
+              <a:rPr lang="en-US" sz="2000" dirty="0" err="1">
+                <a:latin typeface="Arial" panose="020B0604020202020204" pitchFamily="34" charset="0"/>
+                <a:cs typeface="Arial" panose="020B0604020202020204" pitchFamily="34" charset="0"/>
+              </a:rPr>
+              <a:t>có</a:t>
+            </a:r>
+            <a:r>
+              <a:rPr lang="en-US" sz="2000" dirty="0">
+                <a:latin typeface="Arial" panose="020B0604020202020204" pitchFamily="34" charset="0"/>
+                <a:cs typeface="Arial" panose="020B0604020202020204" pitchFamily="34" charset="0"/>
+              </a:rPr>
+              <a:t> </a:t>
+            </a:r>
+            <a:r>
+              <a:rPr lang="en-US" sz="2000" dirty="0" err="1">
+                <a:latin typeface="Arial" panose="020B0604020202020204" pitchFamily="34" charset="0"/>
+                <a:cs typeface="Arial" panose="020B0604020202020204" pitchFamily="34" charset="0"/>
+              </a:rPr>
+              <a:t>thể</a:t>
+            </a:r>
+            <a:r>
+              <a:rPr lang="en-US" sz="2000" dirty="0">
+                <a:latin typeface="Arial" panose="020B0604020202020204" pitchFamily="34" charset="0"/>
+                <a:cs typeface="Arial" panose="020B0604020202020204" pitchFamily="34" charset="0"/>
+              </a:rPr>
+              <a:t> </a:t>
+            </a:r>
+            <a:r>
+              <a:rPr lang="en-US" sz="2000" dirty="0" err="1">
+                <a:latin typeface="Arial" panose="020B0604020202020204" pitchFamily="34" charset="0"/>
+                <a:cs typeface="Arial" panose="020B0604020202020204" pitchFamily="34" charset="0"/>
+              </a:rPr>
+              <a:t>tiếp</a:t>
+            </a:r>
+            <a:r>
+              <a:rPr lang="en-US" sz="2000" dirty="0">
+                <a:latin typeface="Arial" panose="020B0604020202020204" pitchFamily="34" charset="0"/>
+                <a:cs typeface="Arial" panose="020B0604020202020204" pitchFamily="34" charset="0"/>
+              </a:rPr>
+              <a:t> </a:t>
+            </a:r>
+            <a:r>
+              <a:rPr lang="en-US" sz="2000" dirty="0" err="1">
+                <a:latin typeface="Arial" panose="020B0604020202020204" pitchFamily="34" charset="0"/>
+                <a:cs typeface="Arial" panose="020B0604020202020204" pitchFamily="34" charset="0"/>
+              </a:rPr>
+              <a:t>thu</a:t>
+            </a:r>
+            <a:r>
+              <a:rPr lang="en-US" sz="2000" dirty="0">
+                <a:latin typeface="Arial" panose="020B0604020202020204" pitchFamily="34" charset="0"/>
+                <a:cs typeface="Arial" panose="020B0604020202020204" pitchFamily="34" charset="0"/>
+              </a:rPr>
+              <a:t> </a:t>
+            </a:r>
+            <a:r>
+              <a:rPr lang="en-US" sz="2000" dirty="0" err="1">
+                <a:latin typeface="Arial" panose="020B0604020202020204" pitchFamily="34" charset="0"/>
+                <a:cs typeface="Arial" panose="020B0604020202020204" pitchFamily="34" charset="0"/>
+              </a:rPr>
+              <a:t>được</a:t>
+            </a:r>
+            <a:r>
+              <a:rPr lang="en-US" sz="2000" dirty="0">
+                <a:latin typeface="Arial" panose="020B0604020202020204" pitchFamily="34" charset="0"/>
+                <a:cs typeface="Arial" panose="020B0604020202020204" pitchFamily="34" charset="0"/>
+              </a:rPr>
+              <a:t> </a:t>
+            </a:r>
+            <a:r>
+              <a:rPr lang="en-US" sz="2000" dirty="0" err="1">
+                <a:latin typeface="Arial" panose="020B0604020202020204" pitchFamily="34" charset="0"/>
+                <a:cs typeface="Arial" panose="020B0604020202020204" pitchFamily="34" charset="0"/>
+              </a:rPr>
+              <a:t>lượng</a:t>
+            </a:r>
+            <a:r>
+              <a:rPr lang="en-US" sz="2000" dirty="0">
+                <a:latin typeface="Arial" panose="020B0604020202020204" pitchFamily="34" charset="0"/>
+                <a:cs typeface="Arial" panose="020B0604020202020204" pitchFamily="34" charset="0"/>
+              </a:rPr>
+              <a:t> </a:t>
+            </a:r>
+            <a:r>
+              <a:rPr lang="en-US" sz="2000" dirty="0" err="1">
+                <a:latin typeface="Arial" panose="020B0604020202020204" pitchFamily="34" charset="0"/>
+                <a:cs typeface="Arial" panose="020B0604020202020204" pitchFamily="34" charset="0"/>
+              </a:rPr>
+              <a:t>lớn</a:t>
+            </a:r>
+            <a:r>
+              <a:rPr lang="en-US" sz="2000" dirty="0">
+                <a:latin typeface="Arial" panose="020B0604020202020204" pitchFamily="34" charset="0"/>
+                <a:cs typeface="Arial" panose="020B0604020202020204" pitchFamily="34" charset="0"/>
+              </a:rPr>
+              <a:t> </a:t>
+            </a:r>
+            <a:r>
+              <a:rPr lang="en-US" sz="2000" dirty="0" err="1">
+                <a:latin typeface="Arial" panose="020B0604020202020204" pitchFamily="34" charset="0"/>
+                <a:cs typeface="Arial" panose="020B0604020202020204" pitchFamily="34" charset="0"/>
+              </a:rPr>
+              <a:t>đánh</a:t>
+            </a:r>
+            <a:r>
+              <a:rPr lang="en-US" sz="2000" dirty="0">
+                <a:latin typeface="Arial" panose="020B0604020202020204" pitchFamily="34" charset="0"/>
+                <a:cs typeface="Arial" panose="020B0604020202020204" pitchFamily="34" charset="0"/>
+              </a:rPr>
+              <a:t> </a:t>
+            </a:r>
+            <a:r>
+              <a:rPr lang="en-US" sz="2000" dirty="0" err="1">
+                <a:latin typeface="Arial" panose="020B0604020202020204" pitchFamily="34" charset="0"/>
+                <a:cs typeface="Arial" panose="020B0604020202020204" pitchFamily="34" charset="0"/>
+              </a:rPr>
+              <a:t>giá</a:t>
+            </a:r>
+            <a:r>
+              <a:rPr lang="en-US" sz="2000" dirty="0">
+                <a:latin typeface="Arial" panose="020B0604020202020204" pitchFamily="34" charset="0"/>
+                <a:cs typeface="Arial" panose="020B0604020202020204" pitchFamily="34" charset="0"/>
+              </a:rPr>
+              <a:t> </a:t>
+            </a:r>
+            <a:r>
+              <a:rPr lang="en-US" sz="2000" dirty="0" err="1">
+                <a:latin typeface="Arial" panose="020B0604020202020204" pitchFamily="34" charset="0"/>
+                <a:cs typeface="Arial" panose="020B0604020202020204" pitchFamily="34" charset="0"/>
+              </a:rPr>
+              <a:t>như</a:t>
+            </a:r>
+            <a:r>
+              <a:rPr lang="en-US" sz="2000" dirty="0">
+                <a:latin typeface="Arial" panose="020B0604020202020204" pitchFamily="34" charset="0"/>
+                <a:cs typeface="Arial" panose="020B0604020202020204" pitchFamily="34" charset="0"/>
+              </a:rPr>
+              <a:t> </a:t>
+            </a:r>
+            <a:r>
+              <a:rPr lang="en-US" sz="2000" dirty="0" err="1">
+                <a:latin typeface="Arial" panose="020B0604020202020204" pitchFamily="34" charset="0"/>
+                <a:cs typeface="Arial" panose="020B0604020202020204" pitchFamily="34" charset="0"/>
+              </a:rPr>
+              <a:t>vậy</a:t>
+            </a:r>
+            <a:r>
+              <a:rPr lang="en-US" sz="2000" dirty="0">
+                <a:latin typeface="Arial" panose="020B0604020202020204" pitchFamily="34" charset="0"/>
+                <a:cs typeface="Arial" panose="020B0604020202020204" pitchFamily="34" charset="0"/>
+              </a:rPr>
+              <a:t> </a:t>
+            </a:r>
+            <a:r>
+              <a:rPr lang="en-US" sz="2000" dirty="0" err="1">
+                <a:latin typeface="Arial" panose="020B0604020202020204" pitchFamily="34" charset="0"/>
+                <a:cs typeface="Arial" panose="020B0604020202020204" pitchFamily="34" charset="0"/>
+              </a:rPr>
+              <a:t>một</a:t>
+            </a:r>
+            <a:r>
+              <a:rPr lang="en-US" sz="2000" dirty="0">
+                <a:latin typeface="Arial" panose="020B0604020202020204" pitchFamily="34" charset="0"/>
+                <a:cs typeface="Arial" panose="020B0604020202020204" pitchFamily="34" charset="0"/>
+              </a:rPr>
+              <a:t> </a:t>
+            </a:r>
+            <a:r>
+              <a:rPr lang="en-US" sz="2000" dirty="0" err="1">
+                <a:latin typeface="Arial" panose="020B0604020202020204" pitchFamily="34" charset="0"/>
+                <a:cs typeface="Arial" panose="020B0604020202020204" pitchFamily="34" charset="0"/>
+              </a:rPr>
+              <a:t>cách</a:t>
+            </a:r>
+            <a:r>
+              <a:rPr lang="en-US" sz="2000" dirty="0">
+                <a:latin typeface="Arial" panose="020B0604020202020204" pitchFamily="34" charset="0"/>
+                <a:cs typeface="Arial" panose="020B0604020202020204" pitchFamily="34" charset="0"/>
+              </a:rPr>
+              <a:t> </a:t>
+            </a:r>
+            <a:r>
+              <a:rPr lang="en-US" sz="2000" b="1" dirty="0" err="1">
+                <a:latin typeface="Arial" panose="020B0604020202020204" pitchFamily="34" charset="0"/>
+                <a:cs typeface="Arial" panose="020B0604020202020204" pitchFamily="34" charset="0"/>
+              </a:rPr>
+              <a:t>tự</a:t>
+            </a:r>
+            <a:r>
+              <a:rPr lang="en-US" sz="2000" b="1" dirty="0">
+                <a:latin typeface="Arial" panose="020B0604020202020204" pitchFamily="34" charset="0"/>
+                <a:cs typeface="Arial" panose="020B0604020202020204" pitchFamily="34" charset="0"/>
+              </a:rPr>
+              <a:t> </a:t>
+            </a:r>
+            <a:r>
+              <a:rPr lang="en-US" sz="2000" b="1" dirty="0" err="1">
+                <a:latin typeface="Arial" panose="020B0604020202020204" pitchFamily="34" charset="0"/>
+                <a:cs typeface="Arial" panose="020B0604020202020204" pitchFamily="34" charset="0"/>
+              </a:rPr>
+              <a:t>động</a:t>
+            </a:r>
+            <a:r>
+              <a:rPr lang="en-US" sz="2000" b="1" dirty="0">
+                <a:latin typeface="Arial" panose="020B0604020202020204" pitchFamily="34" charset="0"/>
+                <a:cs typeface="Arial" panose="020B0604020202020204" pitchFamily="34" charset="0"/>
+              </a:rPr>
+              <a:t> </a:t>
+            </a:r>
+            <a:r>
+              <a:rPr lang="en-US" sz="2000" b="1" dirty="0" err="1">
+                <a:latin typeface="Arial" panose="020B0604020202020204" pitchFamily="34" charset="0"/>
+                <a:cs typeface="Arial" panose="020B0604020202020204" pitchFamily="34" charset="0"/>
+              </a:rPr>
+              <a:t>và</a:t>
+            </a:r>
+            <a:r>
+              <a:rPr lang="en-US" sz="2000" b="1" dirty="0">
+                <a:latin typeface="Arial" panose="020B0604020202020204" pitchFamily="34" charset="0"/>
+                <a:cs typeface="Arial" panose="020B0604020202020204" pitchFamily="34" charset="0"/>
+              </a:rPr>
+              <a:t> </a:t>
+            </a:r>
+            <a:r>
+              <a:rPr lang="en-US" sz="2000" b="1" dirty="0" err="1">
+                <a:latin typeface="Arial" panose="020B0604020202020204" pitchFamily="34" charset="0"/>
+                <a:cs typeface="Arial" panose="020B0604020202020204" pitchFamily="34" charset="0"/>
+              </a:rPr>
+              <a:t>chính</a:t>
+            </a:r>
+            <a:r>
+              <a:rPr lang="en-US" sz="2000" b="1" dirty="0">
+                <a:latin typeface="Arial" panose="020B0604020202020204" pitchFamily="34" charset="0"/>
+                <a:cs typeface="Arial" panose="020B0604020202020204" pitchFamily="34" charset="0"/>
+              </a:rPr>
+              <a:t> </a:t>
+            </a:r>
+            <a:r>
+              <a:rPr lang="en-US" sz="2000" b="1" dirty="0" err="1">
+                <a:latin typeface="Arial" panose="020B0604020202020204" pitchFamily="34" charset="0"/>
+                <a:cs typeface="Arial" panose="020B0604020202020204" pitchFamily="34" charset="0"/>
+              </a:rPr>
+              <a:t>xác</a:t>
+            </a:r>
+            <a:r>
+              <a:rPr lang="en-US" sz="2000" dirty="0">
+                <a:latin typeface="Arial" panose="020B0604020202020204" pitchFamily="34" charset="0"/>
+                <a:cs typeface="Arial" panose="020B0604020202020204" pitchFamily="34" charset="0"/>
+              </a:rPr>
+              <a:t>.</a:t>
+            </a:r>
+          </a:p>
+        </p:txBody>
+      </p:sp>
+      <p:sp>
+        <p:nvSpPr>
+          <p:cNvPr id="8" name="Arrow: Right 7">
+            <a:extLst>
+              <a:ext uri="{FF2B5EF4-FFF2-40B4-BE49-F238E27FC236}">
+                <a16:creationId xmlns:a16="http://schemas.microsoft.com/office/drawing/2014/main" id="{A1CBFC9A-5A78-DB61-04EE-4758ACBDB2ED}"/>
+              </a:ext>
+            </a:extLst>
+          </p:cNvPr>
+          <p:cNvSpPr/>
+          <p:nvPr/>
+        </p:nvSpPr>
+        <p:spPr>
+          <a:xfrm>
+            <a:off x="7745701" y="3872727"/>
+            <a:ext cx="720148" cy="400110"/>
+          </a:xfrm>
+          <a:prstGeom prst="rightArrow">
+            <a:avLst/>
+          </a:prstGeom>
+          <a:solidFill>
+            <a:srgbClr val="FFCC00"/>
+          </a:solidFill>
+          <a:ln>
+            <a:solidFill>
+              <a:schemeClr val="tx2">
+                <a:lumMod val="75000"/>
+                <a:lumOff val="25000"/>
+              </a:schemeClr>
+            </a:solidFill>
+          </a:ln>
+        </p:spPr>
+        <p:style>
+          <a:lnRef idx="2">
+            <a:schemeClr val="accent1">
+              <a:shade val="15000"/>
+            </a:schemeClr>
+          </a:lnRef>
+          <a:fillRef idx="1">
+            <a:schemeClr val="accent1"/>
+          </a:fillRef>
+          <a:effectRef idx="0">
+            <a:schemeClr val="accent1"/>
+          </a:effectRef>
+          <a:fontRef idx="minor">
+            <a:schemeClr val="lt1"/>
+          </a:fontRef>
+        </p:style>
+        <p:txBody>
+          <a:bodyPr rtlCol="0" anchor="ctr"/>
+          <a:lstStyle/>
+          <a:p>
+            <a:pPr algn="ctr"/>
+            <a:endParaRPr lang="en-US"/>
+          </a:p>
+        </p:txBody>
+      </p:sp>
+      <p:sp>
+        <p:nvSpPr>
+          <p:cNvPr id="10" name="Arrow: Right 9">
+            <a:extLst>
+              <a:ext uri="{FF2B5EF4-FFF2-40B4-BE49-F238E27FC236}">
+                <a16:creationId xmlns:a16="http://schemas.microsoft.com/office/drawing/2014/main" id="{465D9263-8B2C-8A13-6CE0-57666435798B}"/>
+              </a:ext>
+            </a:extLst>
+          </p:cNvPr>
+          <p:cNvSpPr/>
+          <p:nvPr/>
+        </p:nvSpPr>
+        <p:spPr>
+          <a:xfrm>
+            <a:off x="3726151" y="3872727"/>
+            <a:ext cx="720148" cy="400110"/>
+          </a:xfrm>
+          <a:prstGeom prst="rightArrow">
+            <a:avLst/>
+          </a:prstGeom>
+          <a:solidFill>
+            <a:srgbClr val="FFCC00"/>
+          </a:solidFill>
+          <a:ln>
+            <a:solidFill>
+              <a:schemeClr val="tx2">
+                <a:lumMod val="75000"/>
+                <a:lumOff val="25000"/>
+              </a:schemeClr>
+            </a:solidFill>
+          </a:ln>
+        </p:spPr>
+        <p:style>
+          <a:lnRef idx="2">
+            <a:schemeClr val="accent1">
+              <a:shade val="15000"/>
+            </a:schemeClr>
+          </a:lnRef>
+          <a:fillRef idx="1">
+            <a:schemeClr val="accent1"/>
+          </a:fillRef>
+          <a:effectRef idx="0">
+            <a:schemeClr val="accent1"/>
+          </a:effectRef>
+          <a:fontRef idx="minor">
+            <a:schemeClr val="lt1"/>
+          </a:fontRef>
+        </p:style>
+        <p:txBody>
+          <a:bodyPr rtlCol="0" anchor="ctr"/>
+          <a:lstStyle/>
+          <a:p>
+            <a:pPr algn="ctr"/>
+            <a:endParaRPr lang="en-US" dirty="0"/>
           </a:p>
         </p:txBody>
       </p:sp>
     </p:spTree>
     <p:extLst>
       <p:ext uri="{BB962C8B-B14F-4D97-AF65-F5344CB8AC3E}">
-        <p14:creationId xmlns:p14="http://schemas.microsoft.com/office/powerpoint/2010/main" val="4258633536"/>
+        <p14:creationId xmlns:p14="http://schemas.microsoft.com/office/powerpoint/2010/main" val="2591717632"/>
+      </p:ext>
+    </p:extLst>
+  </p:cSld>
+  <p:clrMapOvr>
+    <a:masterClrMapping/>
+  </p:clrMapOvr>
+</p:sld>
+</file>
+
+<file path=ppt/slides/slide4.xml><?xml version="1.0" encoding="utf-8"?>
+<p:sld xmlns:a="http://schemas.openxmlformats.org/drawingml/2006/main" xmlns:r="http://schemas.openxmlformats.org/officeDocument/2006/relationships" xmlns:p="http://schemas.openxmlformats.org/presentationml/2006/main">
+  <p:cSld>
+    <p:spTree>
+      <p:nvGrpSpPr>
+        <p:cNvPr id="1" name="">
+          <a:extLst>
+            <a:ext uri="{FF2B5EF4-FFF2-40B4-BE49-F238E27FC236}">
+              <a16:creationId xmlns:a16="http://schemas.microsoft.com/office/drawing/2014/main" id="{AACEAAFC-B292-6998-7724-747B2D4A4BFB}"/>
+            </a:ext>
+          </a:extLst>
+        </p:cNvPr>
+        <p:cNvGrpSpPr/>
+        <p:nvPr/>
+      </p:nvGrpSpPr>
+      <p:grpSpPr>
+        <a:xfrm>
+          <a:off x="0" y="0"/>
+          <a:ext cx="0" cy="0"/>
+          <a:chOff x="0" y="0"/>
+          <a:chExt cx="0" cy="0"/>
+        </a:xfrm>
+      </p:grpSpPr>
+      <p:sp>
+        <p:nvSpPr>
+          <p:cNvPr id="4" name="Slide Number Placeholder 3">
+            <a:extLst>
+              <a:ext uri="{FF2B5EF4-FFF2-40B4-BE49-F238E27FC236}">
+                <a16:creationId xmlns:a16="http://schemas.microsoft.com/office/drawing/2014/main" id="{C734B2A8-9BC7-9334-E069-567CABA938B2}"/>
+              </a:ext>
+            </a:extLst>
+          </p:cNvPr>
+          <p:cNvSpPr>
+            <a:spLocks noGrp="1"/>
+          </p:cNvSpPr>
+          <p:nvPr>
+            <p:ph type="sldNum" sz="quarter" idx="12"/>
+          </p:nvPr>
+        </p:nvSpPr>
+        <p:spPr/>
+        <p:txBody>
+          <a:bodyPr/>
+          <a:lstStyle/>
+          <a:p>
+            <a:fld id="{C1DACA90-E1C3-4C19-87AA-D4513B3BCE17}" type="slidenum">
+              <a:rPr lang="en-AU" smtClean="0"/>
+              <a:t>3</a:t>
+            </a:fld>
+            <a:endParaRPr lang="en-AU" dirty="0"/>
+          </a:p>
+        </p:txBody>
+      </p:sp>
+      <p:sp>
+        <p:nvSpPr>
+          <p:cNvPr id="11" name="TextBox 10">
+            <a:extLst>
+              <a:ext uri="{FF2B5EF4-FFF2-40B4-BE49-F238E27FC236}">
+                <a16:creationId xmlns:a16="http://schemas.microsoft.com/office/drawing/2014/main" id="{A306B84D-B68E-DA92-D6C3-26AF1FBF2FEB}"/>
+              </a:ext>
+            </a:extLst>
+          </p:cNvPr>
+          <p:cNvSpPr txBox="1"/>
+          <p:nvPr/>
+        </p:nvSpPr>
+        <p:spPr>
+          <a:xfrm>
+            <a:off x="134696" y="364558"/>
+            <a:ext cx="11657254" cy="584775"/>
+          </a:xfrm>
+          <a:prstGeom prst="rect">
+            <a:avLst/>
+          </a:prstGeom>
+          <a:noFill/>
+        </p:spPr>
+        <p:txBody>
+          <a:bodyPr wrap="square" rtlCol="0">
+            <a:spAutoFit/>
+          </a:bodyPr>
+          <a:lstStyle/>
+          <a:p>
+            <a:r>
+              <a:rPr lang="en-US" sz="3200" b="1" dirty="0">
+                <a:latin typeface="Arial" panose="020B0604020202020204" pitchFamily="34" charset="0"/>
+                <a:cs typeface="Arial" panose="020B0604020202020204" pitchFamily="34" charset="0"/>
+              </a:rPr>
+              <a:t>I. TỔNG QUAN ĐỀ TÀI</a:t>
+            </a:r>
+          </a:p>
+        </p:txBody>
+      </p:sp>
+      <p:sp>
+        <p:nvSpPr>
+          <p:cNvPr id="12" name="TextBox 11">
+            <a:extLst>
+              <a:ext uri="{FF2B5EF4-FFF2-40B4-BE49-F238E27FC236}">
+                <a16:creationId xmlns:a16="http://schemas.microsoft.com/office/drawing/2014/main" id="{33949B28-CF1C-0672-7003-C36F157630BF}"/>
+              </a:ext>
+            </a:extLst>
+          </p:cNvPr>
+          <p:cNvSpPr txBox="1"/>
+          <p:nvPr/>
+        </p:nvSpPr>
+        <p:spPr>
+          <a:xfrm>
+            <a:off x="134696" y="1237610"/>
+            <a:ext cx="7595371" cy="400110"/>
+          </a:xfrm>
+          <a:prstGeom prst="rect">
+            <a:avLst/>
+          </a:prstGeom>
+          <a:noFill/>
+        </p:spPr>
+        <p:txBody>
+          <a:bodyPr wrap="square" rtlCol="0">
+            <a:spAutoFit/>
+          </a:bodyPr>
+          <a:lstStyle/>
+          <a:p>
+            <a:r>
+              <a:rPr lang="en-US" sz="2000" b="1" dirty="0">
+                <a:latin typeface="Arial" panose="020B0604020202020204" pitchFamily="34" charset="0"/>
+                <a:cs typeface="Arial" panose="020B0604020202020204" pitchFamily="34" charset="0"/>
+              </a:rPr>
+              <a:t>1.2. </a:t>
+            </a:r>
+            <a:r>
+              <a:rPr lang="en-US" sz="2000" b="1" dirty="0" err="1">
+                <a:latin typeface="Arial" panose="020B0604020202020204" pitchFamily="34" charset="0"/>
+                <a:cs typeface="Arial" panose="020B0604020202020204" pitchFamily="34" charset="0"/>
+              </a:rPr>
+              <a:t>Mục</a:t>
+            </a:r>
+            <a:r>
+              <a:rPr lang="en-US" sz="2000" b="1" dirty="0">
+                <a:latin typeface="Arial" panose="020B0604020202020204" pitchFamily="34" charset="0"/>
+                <a:cs typeface="Arial" panose="020B0604020202020204" pitchFamily="34" charset="0"/>
+              </a:rPr>
+              <a:t> </a:t>
+            </a:r>
+            <a:r>
+              <a:rPr lang="en-US" sz="2000" b="1" dirty="0" err="1">
+                <a:latin typeface="Arial" panose="020B0604020202020204" pitchFamily="34" charset="0"/>
+                <a:cs typeface="Arial" panose="020B0604020202020204" pitchFamily="34" charset="0"/>
+              </a:rPr>
+              <a:t>tiêu</a:t>
+            </a:r>
+            <a:r>
+              <a:rPr lang="en-US" sz="2000" b="1" dirty="0">
+                <a:latin typeface="Arial" panose="020B0604020202020204" pitchFamily="34" charset="0"/>
+                <a:cs typeface="Arial" panose="020B0604020202020204" pitchFamily="34" charset="0"/>
+              </a:rPr>
+              <a:t> </a:t>
+            </a:r>
+            <a:r>
+              <a:rPr lang="en-US" sz="2000" b="1" dirty="0" err="1">
+                <a:latin typeface="Arial" panose="020B0604020202020204" pitchFamily="34" charset="0"/>
+                <a:cs typeface="Arial" panose="020B0604020202020204" pitchFamily="34" charset="0"/>
+              </a:rPr>
+              <a:t>đề</a:t>
+            </a:r>
+            <a:r>
+              <a:rPr lang="en-US" sz="2000" b="1" dirty="0">
+                <a:latin typeface="Arial" panose="020B0604020202020204" pitchFamily="34" charset="0"/>
+                <a:cs typeface="Arial" panose="020B0604020202020204" pitchFamily="34" charset="0"/>
+              </a:rPr>
+              <a:t> </a:t>
+            </a:r>
+            <a:r>
+              <a:rPr lang="en-US" sz="2000" b="1" dirty="0" err="1">
+                <a:latin typeface="Arial" panose="020B0604020202020204" pitchFamily="34" charset="0"/>
+                <a:cs typeface="Arial" panose="020B0604020202020204" pitchFamily="34" charset="0"/>
+              </a:rPr>
+              <a:t>tài</a:t>
+            </a:r>
+            <a:endParaRPr lang="en-US" sz="2000" b="1" dirty="0">
+              <a:latin typeface="Arial" panose="020B0604020202020204" pitchFamily="34" charset="0"/>
+              <a:cs typeface="Arial" panose="020B0604020202020204" pitchFamily="34" charset="0"/>
+            </a:endParaRPr>
+          </a:p>
+        </p:txBody>
+      </p:sp>
+      <p:pic>
+        <p:nvPicPr>
+          <p:cNvPr id="2" name="Picture 1">
+            <a:extLst>
+              <a:ext uri="{FF2B5EF4-FFF2-40B4-BE49-F238E27FC236}">
+                <a16:creationId xmlns:a16="http://schemas.microsoft.com/office/drawing/2014/main" id="{31B91EAA-EF55-AA36-BD38-FC5FB3D2A8E1}"/>
+              </a:ext>
+            </a:extLst>
+          </p:cNvPr>
+          <p:cNvPicPr>
+            <a:picLocks noChangeAspect="1"/>
+          </p:cNvPicPr>
+          <p:nvPr/>
+        </p:nvPicPr>
+        <p:blipFill>
+          <a:blip r:embed="rId3">
+            <a:extLst>
+              <a:ext uri="{28A0092B-C50C-407E-A947-70E740481C1C}">
+                <a14:useLocalDpi xmlns:a14="http://schemas.microsoft.com/office/drawing/2010/main" val="0"/>
+              </a:ext>
+            </a:extLst>
+          </a:blip>
+          <a:srcRect t="-1" r="70983" b="88753"/>
+          <a:stretch>
+            <a:fillRect/>
+          </a:stretch>
+        </p:blipFill>
+        <p:spPr>
+          <a:xfrm>
+            <a:off x="0" y="949333"/>
+            <a:ext cx="3121950" cy="91440"/>
+          </a:xfrm>
+          <a:prstGeom prst="rect">
+            <a:avLst/>
+          </a:prstGeom>
+        </p:spPr>
+      </p:pic>
+      <p:sp>
+        <p:nvSpPr>
+          <p:cNvPr id="3" name="TextBox 2">
+            <a:extLst>
+              <a:ext uri="{FF2B5EF4-FFF2-40B4-BE49-F238E27FC236}">
+                <a16:creationId xmlns:a16="http://schemas.microsoft.com/office/drawing/2014/main" id="{B3209618-3413-33E7-F719-E13D743F8733}"/>
+              </a:ext>
+            </a:extLst>
+          </p:cNvPr>
+          <p:cNvSpPr txBox="1"/>
+          <p:nvPr/>
+        </p:nvSpPr>
+        <p:spPr>
+          <a:xfrm>
+            <a:off x="485775" y="1834557"/>
+            <a:ext cx="3181350" cy="4473991"/>
+          </a:xfrm>
+          <a:prstGeom prst="roundRect">
+            <a:avLst/>
+          </a:prstGeom>
+          <a:ln>
+            <a:solidFill>
+              <a:schemeClr val="tx2">
+                <a:lumMod val="75000"/>
+                <a:lumOff val="25000"/>
+              </a:schemeClr>
+            </a:solidFill>
+          </a:ln>
+        </p:spPr>
+        <p:style>
+          <a:lnRef idx="2">
+            <a:schemeClr val="accent4"/>
+          </a:lnRef>
+          <a:fillRef idx="1">
+            <a:schemeClr val="lt1"/>
+          </a:fillRef>
+          <a:effectRef idx="0">
+            <a:schemeClr val="accent4"/>
+          </a:effectRef>
+          <a:fontRef idx="minor">
+            <a:schemeClr val="dk1"/>
+          </a:fontRef>
+        </p:style>
+        <p:txBody>
+          <a:bodyPr wrap="square" rtlCol="0">
+            <a:spAutoFit/>
+          </a:bodyPr>
+          <a:lstStyle/>
+          <a:p>
+            <a:pPr algn="just">
+              <a:lnSpc>
+                <a:spcPct val="150000"/>
+              </a:lnSpc>
+            </a:pPr>
+            <a:r>
+              <a:rPr lang="en-US" sz="2000" dirty="0">
+                <a:latin typeface="Arial" panose="020B0604020202020204" pitchFamily="34" charset="0"/>
+                <a:cs typeface="Arial" panose="020B0604020202020204" pitchFamily="34" charset="0"/>
+              </a:rPr>
+              <a:t>V</a:t>
+            </a:r>
+            <a:r>
+              <a:rPr lang="vi-VN" sz="2000" dirty="0">
+                <a:latin typeface="Arial" panose="020B0604020202020204" pitchFamily="34" charset="0"/>
+                <a:cs typeface="Arial" panose="020B0604020202020204" pitchFamily="34" charset="0"/>
+              </a:rPr>
+              <a:t>ới sự phát triển mạnh mẽ của các nền tảng thương mại điện tử</a:t>
+            </a:r>
+            <a:r>
+              <a:rPr lang="en-US" sz="2000" dirty="0">
+                <a:latin typeface="Arial" panose="020B0604020202020204" pitchFamily="34" charset="0"/>
+                <a:cs typeface="Arial" panose="020B0604020202020204" pitchFamily="34" charset="0"/>
+              </a:rPr>
+              <a:t>, </a:t>
+            </a:r>
+            <a:r>
+              <a:rPr lang="en-US" sz="2000" dirty="0" err="1">
+                <a:latin typeface="Arial" panose="020B0604020202020204" pitchFamily="34" charset="0"/>
+                <a:cs typeface="Arial" panose="020B0604020202020204" pitchFamily="34" charset="0"/>
+              </a:rPr>
+              <a:t>người</a:t>
+            </a:r>
+            <a:r>
+              <a:rPr lang="en-US" sz="2000" dirty="0">
+                <a:latin typeface="Arial" panose="020B0604020202020204" pitchFamily="34" charset="0"/>
+                <a:cs typeface="Arial" panose="020B0604020202020204" pitchFamily="34" charset="0"/>
+              </a:rPr>
+              <a:t> </a:t>
+            </a:r>
+            <a:r>
+              <a:rPr lang="en-US" sz="2000" dirty="0" err="1">
+                <a:latin typeface="Arial" panose="020B0604020202020204" pitchFamily="34" charset="0"/>
+                <a:cs typeface="Arial" panose="020B0604020202020204" pitchFamily="34" charset="0"/>
+              </a:rPr>
+              <a:t>tiêu</a:t>
+            </a:r>
+            <a:r>
+              <a:rPr lang="en-US" sz="2000" dirty="0">
+                <a:latin typeface="Arial" panose="020B0604020202020204" pitchFamily="34" charset="0"/>
+                <a:cs typeface="Arial" panose="020B0604020202020204" pitchFamily="34" charset="0"/>
+              </a:rPr>
+              <a:t> </a:t>
+            </a:r>
+            <a:r>
+              <a:rPr lang="en-US" sz="2000" dirty="0" err="1">
+                <a:latin typeface="Arial" panose="020B0604020202020204" pitchFamily="34" charset="0"/>
+                <a:cs typeface="Arial" panose="020B0604020202020204" pitchFamily="34" charset="0"/>
+              </a:rPr>
+              <a:t>dùng</a:t>
+            </a:r>
+            <a:r>
+              <a:rPr lang="en-US" sz="2000" dirty="0">
+                <a:latin typeface="Arial" panose="020B0604020202020204" pitchFamily="34" charset="0"/>
+                <a:cs typeface="Arial" panose="020B0604020202020204" pitchFamily="34" charset="0"/>
+              </a:rPr>
+              <a:t> </a:t>
+            </a:r>
+            <a:r>
+              <a:rPr lang="en-US" sz="2000" dirty="0" err="1">
+                <a:latin typeface="Arial" panose="020B0604020202020204" pitchFamily="34" charset="0"/>
+                <a:cs typeface="Arial" panose="020B0604020202020204" pitchFamily="34" charset="0"/>
+              </a:rPr>
+              <a:t>có</a:t>
+            </a:r>
+            <a:r>
+              <a:rPr lang="en-US" sz="2000" dirty="0">
+                <a:latin typeface="Arial" panose="020B0604020202020204" pitchFamily="34" charset="0"/>
+                <a:cs typeface="Arial" panose="020B0604020202020204" pitchFamily="34" charset="0"/>
+              </a:rPr>
+              <a:t> xu </a:t>
+            </a:r>
+            <a:r>
+              <a:rPr lang="en-US" sz="2000" dirty="0" err="1">
+                <a:latin typeface="Arial" panose="020B0604020202020204" pitchFamily="34" charset="0"/>
+                <a:cs typeface="Arial" panose="020B0604020202020204" pitchFamily="34" charset="0"/>
+              </a:rPr>
+              <a:t>hướng</a:t>
+            </a:r>
+            <a:r>
+              <a:rPr lang="en-US" sz="2000" dirty="0">
+                <a:latin typeface="Arial" panose="020B0604020202020204" pitchFamily="34" charset="0"/>
+                <a:cs typeface="Arial" panose="020B0604020202020204" pitchFamily="34" charset="0"/>
+              </a:rPr>
+              <a:t> </a:t>
+            </a:r>
+            <a:r>
+              <a:rPr lang="en-US" sz="2000" dirty="0" err="1">
+                <a:latin typeface="Arial" panose="020B0604020202020204" pitchFamily="34" charset="0"/>
+                <a:cs typeface="Arial" panose="020B0604020202020204" pitchFamily="34" charset="0"/>
+              </a:rPr>
+              <a:t>chuyển</a:t>
+            </a:r>
+            <a:r>
+              <a:rPr lang="en-US" sz="2000" dirty="0">
+                <a:latin typeface="Arial" panose="020B0604020202020204" pitchFamily="34" charset="0"/>
+                <a:cs typeface="Arial" panose="020B0604020202020204" pitchFamily="34" charset="0"/>
+              </a:rPr>
+              <a:t> </a:t>
+            </a:r>
+            <a:r>
+              <a:rPr lang="en-US" sz="2000" dirty="0" err="1">
+                <a:latin typeface="Arial" panose="020B0604020202020204" pitchFamily="34" charset="0"/>
+                <a:cs typeface="Arial" panose="020B0604020202020204" pitchFamily="34" charset="0"/>
+              </a:rPr>
+              <a:t>từ</a:t>
+            </a:r>
+            <a:r>
+              <a:rPr lang="en-US" sz="2000" dirty="0">
+                <a:latin typeface="Arial" panose="020B0604020202020204" pitchFamily="34" charset="0"/>
+                <a:cs typeface="Arial" panose="020B0604020202020204" pitchFamily="34" charset="0"/>
+              </a:rPr>
+              <a:t> </a:t>
+            </a:r>
+            <a:r>
+              <a:rPr lang="en-US" sz="2000" dirty="0" err="1">
+                <a:latin typeface="Arial" panose="020B0604020202020204" pitchFamily="34" charset="0"/>
+                <a:cs typeface="Arial" panose="020B0604020202020204" pitchFamily="34" charset="0"/>
+              </a:rPr>
+              <a:t>mua</a:t>
+            </a:r>
+            <a:r>
+              <a:rPr lang="en-US" sz="2000" dirty="0">
+                <a:latin typeface="Arial" panose="020B0604020202020204" pitchFamily="34" charset="0"/>
+                <a:cs typeface="Arial" panose="020B0604020202020204" pitchFamily="34" charset="0"/>
+              </a:rPr>
+              <a:t> </a:t>
+            </a:r>
+            <a:r>
+              <a:rPr lang="en-US" sz="2000" dirty="0" err="1">
+                <a:latin typeface="Arial" panose="020B0604020202020204" pitchFamily="34" charset="0"/>
+                <a:cs typeface="Arial" panose="020B0604020202020204" pitchFamily="34" charset="0"/>
+              </a:rPr>
+              <a:t>sắm</a:t>
+            </a:r>
+            <a:r>
+              <a:rPr lang="en-US" sz="2000" dirty="0">
+                <a:latin typeface="Arial" panose="020B0604020202020204" pitchFamily="34" charset="0"/>
+                <a:cs typeface="Arial" panose="020B0604020202020204" pitchFamily="34" charset="0"/>
+              </a:rPr>
+              <a:t> </a:t>
+            </a:r>
+            <a:r>
+              <a:rPr lang="en-US" sz="2000" dirty="0" err="1">
+                <a:latin typeface="Arial" panose="020B0604020202020204" pitchFamily="34" charset="0"/>
+                <a:cs typeface="Arial" panose="020B0604020202020204" pitchFamily="34" charset="0"/>
+              </a:rPr>
+              <a:t>trực</a:t>
+            </a:r>
+            <a:r>
+              <a:rPr lang="en-US" sz="2000" dirty="0">
+                <a:latin typeface="Arial" panose="020B0604020202020204" pitchFamily="34" charset="0"/>
+                <a:cs typeface="Arial" panose="020B0604020202020204" pitchFamily="34" charset="0"/>
+              </a:rPr>
+              <a:t> </a:t>
+            </a:r>
+            <a:r>
+              <a:rPr lang="en-US" sz="2000" dirty="0" err="1">
+                <a:latin typeface="Arial" panose="020B0604020202020204" pitchFamily="34" charset="0"/>
+                <a:cs typeface="Arial" panose="020B0604020202020204" pitchFamily="34" charset="0"/>
+              </a:rPr>
+              <a:t>tiếp</a:t>
+            </a:r>
+            <a:r>
+              <a:rPr lang="en-US" sz="2000" dirty="0">
+                <a:latin typeface="Arial" panose="020B0604020202020204" pitchFamily="34" charset="0"/>
+                <a:cs typeface="Arial" panose="020B0604020202020204" pitchFamily="34" charset="0"/>
+              </a:rPr>
+              <a:t> sang </a:t>
+            </a:r>
+            <a:r>
+              <a:rPr lang="en-US" sz="2000" dirty="0" err="1">
+                <a:latin typeface="Arial" panose="020B0604020202020204" pitchFamily="34" charset="0"/>
+                <a:cs typeface="Arial" panose="020B0604020202020204" pitchFamily="34" charset="0"/>
+              </a:rPr>
+              <a:t>mua</a:t>
+            </a:r>
+            <a:r>
+              <a:rPr lang="en-US" sz="2000" dirty="0">
+                <a:latin typeface="Arial" panose="020B0604020202020204" pitchFamily="34" charset="0"/>
+                <a:cs typeface="Arial" panose="020B0604020202020204" pitchFamily="34" charset="0"/>
+              </a:rPr>
+              <a:t> </a:t>
+            </a:r>
+            <a:r>
+              <a:rPr lang="en-US" sz="2000" dirty="0" err="1">
+                <a:latin typeface="Arial" panose="020B0604020202020204" pitchFamily="34" charset="0"/>
+                <a:cs typeface="Arial" panose="020B0604020202020204" pitchFamily="34" charset="0"/>
+              </a:rPr>
+              <a:t>sắm</a:t>
+            </a:r>
+            <a:r>
+              <a:rPr lang="en-US" sz="2000" dirty="0">
+                <a:latin typeface="Arial" panose="020B0604020202020204" pitchFamily="34" charset="0"/>
+                <a:cs typeface="Arial" panose="020B0604020202020204" pitchFamily="34" charset="0"/>
+              </a:rPr>
+              <a:t> </a:t>
+            </a:r>
+            <a:r>
+              <a:rPr lang="en-US" sz="2000" dirty="0" err="1">
+                <a:latin typeface="Arial" panose="020B0604020202020204" pitchFamily="34" charset="0"/>
+                <a:cs typeface="Arial" panose="020B0604020202020204" pitchFamily="34" charset="0"/>
+              </a:rPr>
+              <a:t>trực</a:t>
+            </a:r>
+            <a:r>
+              <a:rPr lang="en-US" sz="2000" dirty="0">
+                <a:latin typeface="Arial" panose="020B0604020202020204" pitchFamily="34" charset="0"/>
+                <a:cs typeface="Arial" panose="020B0604020202020204" pitchFamily="34" charset="0"/>
+              </a:rPr>
+              <a:t> </a:t>
+            </a:r>
+            <a:r>
+              <a:rPr lang="en-US" sz="2000" dirty="0" err="1">
+                <a:latin typeface="Arial" panose="020B0604020202020204" pitchFamily="34" charset="0"/>
+                <a:cs typeface="Arial" panose="020B0604020202020204" pitchFamily="34" charset="0"/>
+              </a:rPr>
+              <a:t>tuyến</a:t>
+            </a:r>
+            <a:r>
+              <a:rPr lang="en-US" sz="2000" dirty="0">
+                <a:latin typeface="Arial" panose="020B0604020202020204" pitchFamily="34" charset="0"/>
+                <a:cs typeface="Arial" panose="020B0604020202020204" pitchFamily="34" charset="0"/>
+              </a:rPr>
+              <a:t> </a:t>
+            </a:r>
+            <a:r>
+              <a:rPr lang="en-US" sz="2000" dirty="0" err="1">
+                <a:latin typeface="Arial" panose="020B0604020202020204" pitchFamily="34" charset="0"/>
+                <a:cs typeface="Arial" panose="020B0604020202020204" pitchFamily="34" charset="0"/>
+              </a:rPr>
+              <a:t>về</a:t>
+            </a:r>
+            <a:r>
+              <a:rPr lang="en-US" sz="2000" dirty="0">
+                <a:latin typeface="Arial" panose="020B0604020202020204" pitchFamily="34" charset="0"/>
+                <a:cs typeface="Arial" panose="020B0604020202020204" pitchFamily="34" charset="0"/>
+              </a:rPr>
+              <a:t> </a:t>
+            </a:r>
+            <a:r>
+              <a:rPr lang="en-US" sz="2000" dirty="0" err="1">
+                <a:latin typeface="Arial" panose="020B0604020202020204" pitchFamily="34" charset="0"/>
+                <a:cs typeface="Arial" panose="020B0604020202020204" pitchFamily="34" charset="0"/>
+              </a:rPr>
+              <a:t>đa</a:t>
+            </a:r>
+            <a:r>
+              <a:rPr lang="en-US" sz="2000" dirty="0">
+                <a:latin typeface="Arial" panose="020B0604020202020204" pitchFamily="34" charset="0"/>
+                <a:cs typeface="Arial" panose="020B0604020202020204" pitchFamily="34" charset="0"/>
+              </a:rPr>
+              <a:t> </a:t>
+            </a:r>
+            <a:r>
+              <a:rPr lang="en-US" sz="2000" dirty="0" err="1">
+                <a:latin typeface="Arial" panose="020B0604020202020204" pitchFamily="34" charset="0"/>
+                <a:cs typeface="Arial" panose="020B0604020202020204" pitchFamily="34" charset="0"/>
+              </a:rPr>
+              <a:t>số</a:t>
+            </a:r>
+            <a:r>
+              <a:rPr lang="en-US" sz="2000" dirty="0">
+                <a:latin typeface="Arial" panose="020B0604020202020204" pitchFamily="34" charset="0"/>
+                <a:cs typeface="Arial" panose="020B0604020202020204" pitchFamily="34" charset="0"/>
+              </a:rPr>
+              <a:t> </a:t>
+            </a:r>
+            <a:r>
+              <a:rPr lang="en-US" sz="2000" dirty="0" err="1">
+                <a:latin typeface="Arial" panose="020B0604020202020204" pitchFamily="34" charset="0"/>
+                <a:cs typeface="Arial" panose="020B0604020202020204" pitchFamily="34" charset="0"/>
+              </a:rPr>
+              <a:t>các</a:t>
+            </a:r>
+            <a:r>
+              <a:rPr lang="en-US" sz="2000" dirty="0">
+                <a:latin typeface="Arial" panose="020B0604020202020204" pitchFamily="34" charset="0"/>
+                <a:cs typeface="Arial" panose="020B0604020202020204" pitchFamily="34" charset="0"/>
+              </a:rPr>
+              <a:t> </a:t>
+            </a:r>
+            <a:r>
+              <a:rPr lang="en-US" sz="2000" dirty="0" err="1">
+                <a:latin typeface="Arial" panose="020B0604020202020204" pitchFamily="34" charset="0"/>
+                <a:cs typeface="Arial" panose="020B0604020202020204" pitchFamily="34" charset="0"/>
+              </a:rPr>
+              <a:t>hàng</a:t>
+            </a:r>
+            <a:r>
+              <a:rPr lang="en-US" sz="2000" dirty="0">
+                <a:latin typeface="Arial" panose="020B0604020202020204" pitchFamily="34" charset="0"/>
+                <a:cs typeface="Arial" panose="020B0604020202020204" pitchFamily="34" charset="0"/>
+              </a:rPr>
+              <a:t> </a:t>
+            </a:r>
+            <a:r>
+              <a:rPr lang="en-US" sz="2000" dirty="0" err="1">
+                <a:latin typeface="Arial" panose="020B0604020202020204" pitchFamily="34" charset="0"/>
+                <a:cs typeface="Arial" panose="020B0604020202020204" pitchFamily="34" charset="0"/>
+              </a:rPr>
+              <a:t>hóa</a:t>
+            </a:r>
+            <a:r>
+              <a:rPr lang="en-US" sz="2000" dirty="0">
+                <a:latin typeface="Arial" panose="020B0604020202020204" pitchFamily="34" charset="0"/>
+                <a:cs typeface="Arial" panose="020B0604020202020204" pitchFamily="34" charset="0"/>
+              </a:rPr>
+              <a:t>.</a:t>
+            </a:r>
+          </a:p>
+          <a:p>
+            <a:pPr algn="just">
+              <a:lnSpc>
+                <a:spcPct val="150000"/>
+              </a:lnSpc>
+            </a:pPr>
+            <a:endParaRPr lang="en-US" sz="2000" dirty="0">
+              <a:latin typeface="Arial" panose="020B0604020202020204" pitchFamily="34" charset="0"/>
+              <a:cs typeface="Arial" panose="020B0604020202020204" pitchFamily="34" charset="0"/>
+            </a:endParaRPr>
+          </a:p>
+        </p:txBody>
+      </p:sp>
+    </p:spTree>
+    <p:extLst>
+      <p:ext uri="{BB962C8B-B14F-4D97-AF65-F5344CB8AC3E}">
+        <p14:creationId xmlns:p14="http://schemas.microsoft.com/office/powerpoint/2010/main" val="868808982"/>
       </p:ext>
     </p:extLst>
   </p:cSld>
